--- a/05_hybrid_style.pptx
+++ b/05_hybrid_style.pptx
@@ -14,7 +14,6 @@
     <p:sldId id="262" r:id="rId13"/>
     <p:sldId id="263" r:id="rId14"/>
     <p:sldId id="264" r:id="rId15"/>
-    <p:sldId id="265" r:id="rId16"/>
   </p:sldIdLst>
   <p:sldSz cx="12191695" cy="6858000" type="screen4x3"/>
   <p:notesSz cx="6858000" cy="9144000"/>
@@ -3112,7 +3111,7 @@
             <a:avLst/>
           </a:prstGeom>
           <a:solidFill>
-            <a:srgbClr val="E9EFF7"/>
+            <a:srgbClr val="FFFFFF"/>
           </a:solidFill>
           <a:ln>
             <a:noFill/>
@@ -3148,8 +3147,8 @@
         </p:nvSpPr>
         <p:spPr>
           <a:xfrm>
-            <a:off x="0" y="2286000"/>
-            <a:ext cx="12191695" cy="2377440"/>
+            <a:off x="731520" y="2560320"/>
+            <a:ext cx="91440" cy="1828800"/>
           </a:xfrm>
           <a:prstGeom prst="rect">
             <a:avLst/>
@@ -3191,8 +3190,8 @@
         </p:nvSpPr>
         <p:spPr>
           <a:xfrm>
-            <a:off x="731520" y="2651760"/>
-            <a:ext cx="10972800" cy="1097280"/>
+            <a:off x="1097280" y="2468880"/>
+            <a:ext cx="10058400" cy="1280160"/>
           </a:xfrm>
           <a:prstGeom prst="rect">
             <a:avLst/>
@@ -3200,20 +3199,20 @@
           <a:noFill/>
         </p:spPr>
         <p:txBody>
-          <a:bodyPr wrap="square">
+          <a:bodyPr wrap="square" lIns="0" rIns="0">
             <a:spAutoFit/>
           </a:bodyPr>
           <a:lstStyle/>
           <a:p>
             <a:pPr algn="l"/>
             <a:r>
-              <a:rPr sz="4000" b="1">
-                <a:solidFill>
-                  <a:srgbClr val="FFFFFF"/>
+              <a:rPr sz="3600" b="1">
+                <a:solidFill>
+                  <a:srgbClr val="1F3A68"/>
                 </a:solidFill>
                 <a:latin typeface="游ゴシック"/>
               </a:rPr>
-              <a:t>AI全体推進チーム 定例会 議事録</a:t>
+              <a:t>AI全体推進チーム 定例会</a:t>
             </a:r>
           </a:p>
         </p:txBody>
@@ -3226,8 +3225,8 @@
         </p:nvSpPr>
         <p:spPr>
           <a:xfrm>
-            <a:off x="731520" y="3749039"/>
-            <a:ext cx="10972800" cy="548640"/>
+            <a:off x="1097280" y="3840480"/>
+            <a:ext cx="10058400" cy="548640"/>
           </a:xfrm>
           <a:prstGeom prst="rect">
             <a:avLst/>
@@ -3235,20 +3234,20 @@
           <a:noFill/>
         </p:spPr>
         <p:txBody>
-          <a:bodyPr wrap="square">
+          <a:bodyPr wrap="square" lIns="0" rIns="0">
             <a:spAutoFit/>
           </a:bodyPr>
           <a:lstStyle/>
           <a:p>
             <a:pPr algn="l"/>
             <a:r>
-              <a:rPr sz="1600" b="0">
-                <a:solidFill>
-                  <a:srgbClr val="D5E1F5"/>
+              <a:rPr sz="1400" b="0">
+                <a:solidFill>
+                  <a:srgbClr val="6C757D"/>
                 </a:solidFill>
                 <a:latin typeface="游ゴシック"/>
               </a:rPr>
-              <a:t>2026年04月21日（火）08:00-09:00</a:t>
+              <a:t>2026.04.21（火） 08:00-09:00</a:t>
             </a:r>
           </a:p>
         </p:txBody>
@@ -3261,8 +3260,8 @@
         </p:nvSpPr>
         <p:spPr>
           <a:xfrm>
-            <a:off x="731520" y="5943600"/>
-            <a:ext cx="10972800" cy="365760"/>
+            <a:off x="1097280" y="6217920"/>
+            <a:ext cx="10058400" cy="365760"/>
           </a:xfrm>
           <a:prstGeom prst="rect">
             <a:avLst/>
@@ -3270,186 +3269,20 @@
           <a:noFill/>
         </p:spPr>
         <p:txBody>
-          <a:bodyPr wrap="square">
+          <a:bodyPr wrap="square" lIns="0" rIns="0">
             <a:spAutoFit/>
           </a:bodyPr>
           <a:lstStyle/>
           <a:p>
             <a:pPr algn="l"/>
             <a:r>
-              <a:rPr sz="1000" b="0">
+              <a:rPr sz="900" b="0">
                 <a:solidFill>
                   <a:srgbClr val="6C757D"/>
                 </a:solidFill>
                 <a:latin typeface="游ゴシック"/>
               </a:rPr>
-              <a:t>作成: AI推進チーム事務局 / skill: jp-automation-pptx v1.0</a:t>
-            </a:r>
-          </a:p>
-        </p:txBody>
-      </p:sp>
-    </p:spTree>
-  </p:cSld>
-  <p:clrMapOvr>
-    <a:masterClrMapping/>
-  </p:clrMapOvr>
-</p:sld>
-</file>
-
-<file path=ppt/slides/slide10.xml><?xml version="1.0" encoding="utf-8"?>
-<p:sld xmlns:a="http://schemas.openxmlformats.org/drawingml/2006/main" xmlns:p="http://schemas.openxmlformats.org/presentationml/2006/main" xmlns:r="http://schemas.openxmlformats.org/officeDocument/2006/relationships">
-  <p:cSld>
-    <p:spTree>
-      <p:nvGrpSpPr>
-        <p:cNvPr id="1" name=""/>
-        <p:cNvGrpSpPr/>
-        <p:nvPr/>
-      </p:nvGrpSpPr>
-      <p:grpSpPr/>
-      <p:sp>
-        <p:nvSpPr>
-          <p:cNvPr id="2" name="Rectangle 1"/>
-          <p:cNvSpPr/>
-          <p:nvPr/>
-        </p:nvSpPr>
-        <p:spPr>
-          <a:xfrm>
-            <a:off x="0" y="0"/>
-            <a:ext cx="12191695" cy="6858000"/>
-          </a:xfrm>
-          <a:prstGeom prst="rect">
-            <a:avLst/>
-          </a:prstGeom>
-          <a:solidFill>
-            <a:srgbClr val="1F3A68"/>
-          </a:solidFill>
-          <a:ln>
-            <a:noFill/>
-          </a:ln>
-        </p:spPr>
-        <p:style>
-          <a:lnRef idx="1">
-            <a:schemeClr val="accent1"/>
-          </a:lnRef>
-          <a:fillRef idx="3">
-            <a:schemeClr val="accent1"/>
-          </a:fillRef>
-          <a:effectRef idx="2">
-            <a:schemeClr val="accent1"/>
-          </a:effectRef>
-          <a:fontRef idx="minor">
-            <a:schemeClr val="lt1"/>
-          </a:fontRef>
-        </p:style>
-        <p:txBody>
-          <a:bodyPr rtlCol="0" anchor="ctr"/>
-          <a:lstStyle/>
-          <a:p>
-            <a:pPr algn="ctr"/>
-          </a:p>
-        </p:txBody>
-      </p:sp>
-      <p:sp>
-        <p:nvSpPr>
-          <p:cNvPr id="3" name="TextBox 2"/>
-          <p:cNvSpPr txBox="1"/>
-          <p:nvPr/>
-        </p:nvSpPr>
-        <p:spPr>
-          <a:xfrm>
-            <a:off x="731520" y="2377440"/>
-            <a:ext cx="10972800" cy="1371600"/>
-          </a:xfrm>
-          <a:prstGeom prst="rect">
-            <a:avLst/>
-          </a:prstGeom>
-          <a:noFill/>
-        </p:spPr>
-        <p:txBody>
-          <a:bodyPr wrap="square">
-            <a:spAutoFit/>
-          </a:bodyPr>
-          <a:lstStyle/>
-          <a:p>
-            <a:pPr algn="l"/>
-            <a:r>
-              <a:rPr sz="4400" b="1">
-                <a:solidFill>
-                  <a:srgbClr val="FFFFFF"/>
-                </a:solidFill>
-                <a:latin typeface="游ゴシック"/>
-              </a:rPr>
-              <a:t>次回: 2026年5月 予定</a:t>
-            </a:r>
-          </a:p>
-        </p:txBody>
-      </p:sp>
-      <p:sp>
-        <p:nvSpPr>
-          <p:cNvPr id="4" name="TextBox 3"/>
-          <p:cNvSpPr txBox="1"/>
-          <p:nvPr/>
-        </p:nvSpPr>
-        <p:spPr>
-          <a:xfrm>
-            <a:off x="731520" y="3749039"/>
-            <a:ext cx="10972800" cy="640080"/>
-          </a:xfrm>
-          <a:prstGeom prst="rect">
-            <a:avLst/>
-          </a:prstGeom>
-          <a:noFill/>
-        </p:spPr>
-        <p:txBody>
-          <a:bodyPr wrap="square">
-            <a:spAutoFit/>
-          </a:bodyPr>
-          <a:lstStyle/>
-          <a:p>
-            <a:pPr algn="l"/>
-            <a:r>
-              <a:rPr sz="2000" b="0">
-                <a:solidFill>
-                  <a:srgbClr val="D5E1F5"/>
-                </a:solidFill>
-                <a:latin typeface="游ゴシック"/>
-              </a:rPr>
-              <a:t>マイルストーン: 6月15日 AI活用展示会（経営層報告）</a:t>
-            </a:r>
-          </a:p>
-        </p:txBody>
-      </p:sp>
-      <p:sp>
-        <p:nvSpPr>
-          <p:cNvPr id="5" name="TextBox 4"/>
-          <p:cNvSpPr txBox="1"/>
-          <p:nvPr/>
-        </p:nvSpPr>
-        <p:spPr>
-          <a:xfrm>
-            <a:off x="731520" y="6217920"/>
-            <a:ext cx="10972800" cy="365760"/>
-          </a:xfrm>
-          <a:prstGeom prst="rect">
-            <a:avLst/>
-          </a:prstGeom>
-          <a:noFill/>
-        </p:spPr>
-        <p:txBody>
-          <a:bodyPr wrap="square">
-            <a:spAutoFit/>
-          </a:bodyPr>
-          <a:lstStyle/>
-          <a:p>
-            <a:pPr algn="l"/>
-            <a:r>
-              <a:rPr sz="1000" b="0">
-                <a:solidFill>
-                  <a:srgbClr val="A3B8D8"/>
-                </a:solidFill>
-                <a:latin typeface="游ゴシック"/>
-              </a:rPr>
-              <a:t>skill: jp-automation-pptx v1.0</a:t>
+              <a:t>AI推進チーム事務局</a:t>
             </a:r>
           </a:p>
         </p:txBody>
@@ -3474,14 +3307,49 @@
       <p:grpSpPr/>
       <p:sp>
         <p:nvSpPr>
-          <p:cNvPr id="2" name="Rectangle 1"/>
+          <p:cNvPr id="2" name="TextBox 1"/>
+          <p:cNvSpPr txBox="1"/>
+          <p:nvPr/>
+        </p:nvSpPr>
+        <p:spPr>
+          <a:xfrm>
+            <a:off x="914400" y="822960"/>
+            <a:ext cx="10058400" cy="457200"/>
+          </a:xfrm>
+          <a:prstGeom prst="rect">
+            <a:avLst/>
+          </a:prstGeom>
+          <a:noFill/>
+        </p:spPr>
+        <p:txBody>
+          <a:bodyPr wrap="square" lIns="0" rIns="0">
+            <a:spAutoFit/>
+          </a:bodyPr>
+          <a:lstStyle/>
+          <a:p>
+            <a:pPr algn="l"/>
+            <a:r>
+              <a:rPr sz="1100" b="1">
+                <a:solidFill>
+                  <a:srgbClr val="6C757D"/>
+                </a:solidFill>
+                <a:latin typeface="游ゴシック"/>
+              </a:rPr>
+              <a:t>AGENDA</a:t>
+            </a:r>
+          </a:p>
+        </p:txBody>
+      </p:sp>
+      <p:sp>
+        <p:nvSpPr>
+          <p:cNvPr id="3" name="Rectangle 2"/>
           <p:cNvSpPr/>
           <p:nvPr/>
         </p:nvSpPr>
         <p:spPr>
           <a:xfrm>
-            <a:off x="0" y="0"/>
-            <a:ext cx="12191695" cy="822960"/>
+            <a:off x="914400" y="1325880"/>
+            <a:ext cx="914400" cy="36576"/>
           </a:xfrm>
           <a:prstGeom prst="rect">
             <a:avLst/>
@@ -3517,14 +3385,14 @@
       </p:sp>
       <p:sp>
         <p:nvSpPr>
-          <p:cNvPr id="3" name="TextBox 2"/>
+          <p:cNvPr id="4" name="TextBox 3"/>
           <p:cNvSpPr txBox="1"/>
           <p:nvPr/>
         </p:nvSpPr>
         <p:spPr>
           <a:xfrm>
-            <a:off x="365760" y="182880"/>
-            <a:ext cx="11430000" cy="548640"/>
+            <a:off x="914400" y="2286000"/>
+            <a:ext cx="731520" cy="731520"/>
           </a:xfrm>
           <a:prstGeom prst="rect">
             <a:avLst/>
@@ -3532,65 +3400,21 @@
           <a:noFill/>
         </p:spPr>
         <p:txBody>
-          <a:bodyPr wrap="none">
+          <a:bodyPr wrap="square" lIns="0" rIns="0">
             <a:spAutoFit/>
           </a:bodyPr>
           <a:lstStyle/>
           <a:p>
-            <a:r>
-              <a:rPr sz="2200" b="1">
-                <a:solidFill>
-                  <a:srgbClr val="FFFFFF"/>
+            <a:pPr algn="l"/>
+            <a:r>
+              <a:rPr sz="2800" b="1">
+                <a:solidFill>
+                  <a:srgbClr val="2E6BC0"/>
                 </a:solidFill>
                 <a:latin typeface="游ゴシック"/>
               </a:rPr>
-              <a:t>エグゼクティブサマリー</a:t>
-            </a:r>
-          </a:p>
-        </p:txBody>
-      </p:sp>
-      <p:sp>
-        <p:nvSpPr>
-          <p:cNvPr id="4" name="Rounded Rectangle 3"/>
-          <p:cNvSpPr/>
-          <p:nvPr/>
-        </p:nvSpPr>
-        <p:spPr>
-          <a:xfrm>
-            <a:off x="457200" y="1280160"/>
-            <a:ext cx="2674620" cy="2286000"/>
-          </a:xfrm>
-          <a:prstGeom prst="roundRect">
-            <a:avLst/>
-          </a:prstGeom>
-          <a:solidFill>
-            <a:srgbClr val="FFFFFF"/>
-          </a:solidFill>
-          <a:ln>
-            <a:solidFill>
-              <a:srgbClr val="2E6BC0"/>
-            </a:solidFill>
-          </a:ln>
-        </p:spPr>
-        <p:style>
-          <a:lnRef idx="1">
-            <a:schemeClr val="accent1"/>
-          </a:lnRef>
-          <a:fillRef idx="3">
-            <a:schemeClr val="accent1"/>
-          </a:fillRef>
-          <a:effectRef idx="2">
-            <a:schemeClr val="accent1"/>
-          </a:effectRef>
-          <a:fontRef idx="minor">
-            <a:schemeClr val="lt1"/>
-          </a:fontRef>
-        </p:style>
-        <p:txBody>
-          <a:bodyPr rtlCol="0" anchor="ctr"/>
-          <a:lstStyle/>
-          <a:p>
-            <a:pPr algn="ctr"/>
+              <a:t>01</a:t>
+            </a:r>
           </a:p>
         </p:txBody>
       </p:sp>
@@ -3602,8 +3426,8 @@
         </p:nvSpPr>
         <p:spPr>
           <a:xfrm>
-            <a:off x="640080" y="1417320"/>
-            <a:ext cx="2308860" cy="365760"/>
+            <a:off x="1828800" y="2423160"/>
+            <a:ext cx="9144000" cy="731520"/>
           </a:xfrm>
           <a:prstGeom prst="rect">
             <a:avLst/>
@@ -3611,20 +3435,20 @@
           <a:noFill/>
         </p:spPr>
         <p:txBody>
-          <a:bodyPr wrap="square">
+          <a:bodyPr wrap="square" lIns="0" rIns="0">
             <a:spAutoFit/>
           </a:bodyPr>
           <a:lstStyle/>
           <a:p>
             <a:pPr algn="l"/>
             <a:r>
-              <a:rPr sz="1200" b="1">
-                <a:solidFill>
-                  <a:srgbClr val="2E6BC0"/>
+              <a:rPr sz="1800" b="0">
+                <a:solidFill>
+                  <a:srgbClr val="22262E"/>
                 </a:solidFill>
                 <a:latin typeface="游ゴシック"/>
               </a:rPr>
-              <a:t>参加</a:t>
+              <a:t>品質ワーキング</a:t>
             </a:r>
           </a:p>
         </p:txBody>
@@ -3637,8 +3461,8 @@
         </p:nvSpPr>
         <p:spPr>
           <a:xfrm>
-            <a:off x="640080" y="1828800"/>
-            <a:ext cx="2308860" cy="914400"/>
+            <a:off x="914400" y="3291840"/>
+            <a:ext cx="731520" cy="731520"/>
           </a:xfrm>
           <a:prstGeom prst="rect">
             <a:avLst/>
@@ -3646,20 +3470,20 @@
           <a:noFill/>
         </p:spPr>
         <p:txBody>
-          <a:bodyPr wrap="square">
+          <a:bodyPr wrap="square" lIns="0" rIns="0">
             <a:spAutoFit/>
           </a:bodyPr>
           <a:lstStyle/>
           <a:p>
             <a:pPr algn="l"/>
             <a:r>
-              <a:rPr sz="4000" b="1">
-                <a:solidFill>
-                  <a:srgbClr val="1F3A68"/>
+              <a:rPr sz="2800" b="1">
+                <a:solidFill>
+                  <a:srgbClr val="2E6BC0"/>
                 </a:solidFill>
                 <a:latin typeface="游ゴシック"/>
               </a:rPr>
-              <a:t>8名</a:t>
+              <a:t>02</a:t>
             </a:r>
           </a:p>
         </p:txBody>
@@ -3672,8 +3496,8 @@
         </p:nvSpPr>
         <p:spPr>
           <a:xfrm>
-            <a:off x="640080" y="2926080"/>
-            <a:ext cx="2308860" cy="457200"/>
+            <a:off x="1828800" y="3429000"/>
+            <a:ext cx="9144000" cy="731520"/>
           </a:xfrm>
           <a:prstGeom prst="rect">
             <a:avLst/>
@@ -3681,66 +3505,56 @@
           <a:noFill/>
         </p:spPr>
         <p:txBody>
-          <a:bodyPr wrap="square">
+          <a:bodyPr wrap="square" lIns="0" rIns="0">
             <a:spAutoFit/>
           </a:bodyPr>
           <a:lstStyle/>
           <a:p>
             <a:pPr algn="l"/>
             <a:r>
-              <a:rPr sz="1100" b="0">
-                <a:solidFill>
-                  <a:srgbClr val="6C757D"/>
+              <a:rPr sz="1800" b="0">
+                <a:solidFill>
+                  <a:srgbClr val="22262E"/>
                 </a:solidFill>
                 <a:latin typeface="游ゴシック"/>
               </a:rPr>
-              <a:t>8部門横断</a:t>
-            </a:r>
-          </a:p>
-        </p:txBody>
-      </p:sp>
-      <p:sp>
-        <p:nvSpPr>
-          <p:cNvPr id="8" name="Rounded Rectangle 7"/>
-          <p:cNvSpPr/>
-          <p:nvPr/>
-        </p:nvSpPr>
-        <p:spPr>
-          <a:xfrm>
-            <a:off x="3314700" y="1280160"/>
-            <a:ext cx="2674620" cy="2286000"/>
-          </a:xfrm>
-          <a:prstGeom prst="roundRect">
-            <a:avLst/>
-          </a:prstGeom>
-          <a:solidFill>
-            <a:srgbClr val="FFFFFF"/>
-          </a:solidFill>
-          <a:ln>
-            <a:solidFill>
-              <a:srgbClr val="2E6BC0"/>
-            </a:solidFill>
-          </a:ln>
-        </p:spPr>
-        <p:style>
-          <a:lnRef idx="1">
-            <a:schemeClr val="accent1"/>
-          </a:lnRef>
-          <a:fillRef idx="3">
-            <a:schemeClr val="accent1"/>
-          </a:fillRef>
-          <a:effectRef idx="2">
-            <a:schemeClr val="accent1"/>
-          </a:effectRef>
-          <a:fontRef idx="minor">
-            <a:schemeClr val="lt1"/>
-          </a:fontRef>
-        </p:style>
-        <p:txBody>
-          <a:bodyPr rtlCol="0" anchor="ctr"/>
-          <a:lstStyle/>
-          <a:p>
-            <a:pPr algn="ctr"/>
+              <a:t>展開・広報ワーキング</a:t>
+            </a:r>
+          </a:p>
+        </p:txBody>
+      </p:sp>
+      <p:sp>
+        <p:nvSpPr>
+          <p:cNvPr id="8" name="TextBox 7"/>
+          <p:cNvSpPr txBox="1"/>
+          <p:nvPr/>
+        </p:nvSpPr>
+        <p:spPr>
+          <a:xfrm>
+            <a:off x="914400" y="4297680"/>
+            <a:ext cx="731520" cy="731520"/>
+          </a:xfrm>
+          <a:prstGeom prst="rect">
+            <a:avLst/>
+          </a:prstGeom>
+          <a:noFill/>
+        </p:spPr>
+        <p:txBody>
+          <a:bodyPr wrap="square" lIns="0" rIns="0">
+            <a:spAutoFit/>
+          </a:bodyPr>
+          <a:lstStyle/>
+          <a:p>
+            <a:pPr algn="l"/>
+            <a:r>
+              <a:rPr sz="2800" b="1">
+                <a:solidFill>
+                  <a:srgbClr val="2E6BC0"/>
+                </a:solidFill>
+                <a:latin typeface="游ゴシック"/>
+              </a:rPr>
+              <a:t>03</a:t>
+            </a:r>
           </a:p>
         </p:txBody>
       </p:sp>
@@ -3752,8 +3566,8 @@
         </p:nvSpPr>
         <p:spPr>
           <a:xfrm>
-            <a:off x="3497580" y="1417320"/>
-            <a:ext cx="2308860" cy="365760"/>
+            <a:off x="1828800" y="4434840"/>
+            <a:ext cx="9144000" cy="731520"/>
           </a:xfrm>
           <a:prstGeom prst="rect">
             <a:avLst/>
@@ -3761,729 +3575,20 @@
           <a:noFill/>
         </p:spPr>
         <p:txBody>
-          <a:bodyPr wrap="square">
+          <a:bodyPr wrap="square" lIns="0" rIns="0">
             <a:spAutoFit/>
           </a:bodyPr>
           <a:lstStyle/>
           <a:p>
             <a:pPr algn="l"/>
             <a:r>
-              <a:rPr sz="1200" b="1">
-                <a:solidFill>
-                  <a:srgbClr val="2E6BC0"/>
+              <a:rPr sz="1800" b="0">
+                <a:solidFill>
+                  <a:srgbClr val="22262E"/>
                 </a:solidFill>
                 <a:latin typeface="游ゴシック"/>
               </a:rPr>
-              <a:t>決定事項</a:t>
-            </a:r>
-          </a:p>
-        </p:txBody>
-      </p:sp>
-      <p:sp>
-        <p:nvSpPr>
-          <p:cNvPr id="10" name="TextBox 9"/>
-          <p:cNvSpPr txBox="1"/>
-          <p:nvPr/>
-        </p:nvSpPr>
-        <p:spPr>
-          <a:xfrm>
-            <a:off x="3497580" y="1828800"/>
-            <a:ext cx="2308860" cy="914400"/>
-          </a:xfrm>
-          <a:prstGeom prst="rect">
-            <a:avLst/>
-          </a:prstGeom>
-          <a:noFill/>
-        </p:spPr>
-        <p:txBody>
-          <a:bodyPr wrap="square">
-            <a:spAutoFit/>
-          </a:bodyPr>
-          <a:lstStyle/>
-          <a:p>
-            <a:pPr algn="l"/>
-            <a:r>
-              <a:rPr sz="4000" b="1">
-                <a:solidFill>
-                  <a:srgbClr val="1F3A68"/>
-                </a:solidFill>
-                <a:latin typeface="游ゴシック"/>
-              </a:rPr>
-              <a:t>6件</a:t>
-            </a:r>
-          </a:p>
-        </p:txBody>
-      </p:sp>
-      <p:sp>
-        <p:nvSpPr>
-          <p:cNvPr id="11" name="TextBox 10"/>
-          <p:cNvSpPr txBox="1"/>
-          <p:nvPr/>
-        </p:nvSpPr>
-        <p:spPr>
-          <a:xfrm>
-            <a:off x="3497580" y="2926080"/>
-            <a:ext cx="2308860" cy="457200"/>
-          </a:xfrm>
-          <a:prstGeom prst="rect">
-            <a:avLst/>
-          </a:prstGeom>
-          <a:noFill/>
-        </p:spPr>
-        <p:txBody>
-          <a:bodyPr wrap="square">
-            <a:spAutoFit/>
-          </a:bodyPr>
-          <a:lstStyle/>
-          <a:p>
-            <a:pPr algn="l"/>
-            <a:r>
-              <a:rPr sz="1100" b="0">
-                <a:solidFill>
-                  <a:srgbClr val="6C757D"/>
-                </a:solidFill>
-                <a:latin typeface="游ゴシック"/>
-              </a:rPr>
-              <a:t>全会一致</a:t>
-            </a:r>
-          </a:p>
-        </p:txBody>
-      </p:sp>
-      <p:sp>
-        <p:nvSpPr>
-          <p:cNvPr id="12" name="Rounded Rectangle 11"/>
-          <p:cNvSpPr/>
-          <p:nvPr/>
-        </p:nvSpPr>
-        <p:spPr>
-          <a:xfrm>
-            <a:off x="6172200" y="1280160"/>
-            <a:ext cx="2674620" cy="2286000"/>
-          </a:xfrm>
-          <a:prstGeom prst="roundRect">
-            <a:avLst/>
-          </a:prstGeom>
-          <a:solidFill>
-            <a:srgbClr val="FFFFFF"/>
-          </a:solidFill>
-          <a:ln>
-            <a:solidFill>
-              <a:srgbClr val="2E6BC0"/>
-            </a:solidFill>
-          </a:ln>
-        </p:spPr>
-        <p:style>
-          <a:lnRef idx="1">
-            <a:schemeClr val="accent1"/>
-          </a:lnRef>
-          <a:fillRef idx="3">
-            <a:schemeClr val="accent1"/>
-          </a:fillRef>
-          <a:effectRef idx="2">
-            <a:schemeClr val="accent1"/>
-          </a:effectRef>
-          <a:fontRef idx="minor">
-            <a:schemeClr val="lt1"/>
-          </a:fontRef>
-        </p:style>
-        <p:txBody>
-          <a:bodyPr rtlCol="0" anchor="ctr"/>
-          <a:lstStyle/>
-          <a:p>
-            <a:pPr algn="ctr"/>
-          </a:p>
-        </p:txBody>
-      </p:sp>
-      <p:sp>
-        <p:nvSpPr>
-          <p:cNvPr id="13" name="TextBox 12"/>
-          <p:cNvSpPr txBox="1"/>
-          <p:nvPr/>
-        </p:nvSpPr>
-        <p:spPr>
-          <a:xfrm>
-            <a:off x="6355080" y="1417320"/>
-            <a:ext cx="2308860" cy="365760"/>
-          </a:xfrm>
-          <a:prstGeom prst="rect">
-            <a:avLst/>
-          </a:prstGeom>
-          <a:noFill/>
-        </p:spPr>
-        <p:txBody>
-          <a:bodyPr wrap="square">
-            <a:spAutoFit/>
-          </a:bodyPr>
-          <a:lstStyle/>
-          <a:p>
-            <a:pPr algn="l"/>
-            <a:r>
-              <a:rPr sz="1200" b="1">
-                <a:solidFill>
-                  <a:srgbClr val="2E6BC0"/>
-                </a:solidFill>
-                <a:latin typeface="游ゴシック"/>
-              </a:rPr>
-              <a:t>ToDo</a:t>
-            </a:r>
-          </a:p>
-        </p:txBody>
-      </p:sp>
-      <p:sp>
-        <p:nvSpPr>
-          <p:cNvPr id="14" name="TextBox 13"/>
-          <p:cNvSpPr txBox="1"/>
-          <p:nvPr/>
-        </p:nvSpPr>
-        <p:spPr>
-          <a:xfrm>
-            <a:off x="6355080" y="1828800"/>
-            <a:ext cx="2308860" cy="914400"/>
-          </a:xfrm>
-          <a:prstGeom prst="rect">
-            <a:avLst/>
-          </a:prstGeom>
-          <a:noFill/>
-        </p:spPr>
-        <p:txBody>
-          <a:bodyPr wrap="square">
-            <a:spAutoFit/>
-          </a:bodyPr>
-          <a:lstStyle/>
-          <a:p>
-            <a:pPr algn="l"/>
-            <a:r>
-              <a:rPr sz="4000" b="1">
-                <a:solidFill>
-                  <a:srgbClr val="1F3A68"/>
-                </a:solidFill>
-                <a:latin typeface="游ゴシック"/>
-              </a:rPr>
-              <a:t>7件</a:t>
-            </a:r>
-          </a:p>
-        </p:txBody>
-      </p:sp>
-      <p:sp>
-        <p:nvSpPr>
-          <p:cNvPr id="15" name="TextBox 14"/>
-          <p:cNvSpPr txBox="1"/>
-          <p:nvPr/>
-        </p:nvSpPr>
-        <p:spPr>
-          <a:xfrm>
-            <a:off x="6355080" y="2926080"/>
-            <a:ext cx="2308860" cy="457200"/>
-          </a:xfrm>
-          <a:prstGeom prst="rect">
-            <a:avLst/>
-          </a:prstGeom>
-          <a:noFill/>
-        </p:spPr>
-        <p:txBody>
-          <a:bodyPr wrap="square">
-            <a:spAutoFit/>
-          </a:bodyPr>
-          <a:lstStyle/>
-          <a:p>
-            <a:pPr algn="l"/>
-            <a:r>
-              <a:rPr sz="1100" b="0">
-                <a:solidFill>
-                  <a:srgbClr val="6C757D"/>
-                </a:solidFill>
-                <a:latin typeface="游ゴシック"/>
-              </a:rPr>
-              <a:t>5名に分担</a:t>
-            </a:r>
-          </a:p>
-        </p:txBody>
-      </p:sp>
-      <p:sp>
-        <p:nvSpPr>
-          <p:cNvPr id="16" name="Rounded Rectangle 15"/>
-          <p:cNvSpPr/>
-          <p:nvPr/>
-        </p:nvSpPr>
-        <p:spPr>
-          <a:xfrm>
-            <a:off x="9029700" y="1280160"/>
-            <a:ext cx="2674620" cy="2286000"/>
-          </a:xfrm>
-          <a:prstGeom prst="roundRect">
-            <a:avLst/>
-          </a:prstGeom>
-          <a:solidFill>
-            <a:srgbClr val="FFFFFF"/>
-          </a:solidFill>
-          <a:ln>
-            <a:solidFill>
-              <a:srgbClr val="2E6BC0"/>
-            </a:solidFill>
-          </a:ln>
-        </p:spPr>
-        <p:style>
-          <a:lnRef idx="1">
-            <a:schemeClr val="accent1"/>
-          </a:lnRef>
-          <a:fillRef idx="3">
-            <a:schemeClr val="accent1"/>
-          </a:fillRef>
-          <a:effectRef idx="2">
-            <a:schemeClr val="accent1"/>
-          </a:effectRef>
-          <a:fontRef idx="minor">
-            <a:schemeClr val="lt1"/>
-          </a:fontRef>
-        </p:style>
-        <p:txBody>
-          <a:bodyPr rtlCol="0" anchor="ctr"/>
-          <a:lstStyle/>
-          <a:p>
-            <a:pPr algn="ctr"/>
-          </a:p>
-        </p:txBody>
-      </p:sp>
-      <p:sp>
-        <p:nvSpPr>
-          <p:cNvPr id="17" name="TextBox 16"/>
-          <p:cNvSpPr txBox="1"/>
-          <p:nvPr/>
-        </p:nvSpPr>
-        <p:spPr>
-          <a:xfrm>
-            <a:off x="9212580" y="1417320"/>
-            <a:ext cx="2308860" cy="365760"/>
-          </a:xfrm>
-          <a:prstGeom prst="rect">
-            <a:avLst/>
-          </a:prstGeom>
-          <a:noFill/>
-        </p:spPr>
-        <p:txBody>
-          <a:bodyPr wrap="square">
-            <a:spAutoFit/>
-          </a:bodyPr>
-          <a:lstStyle/>
-          <a:p>
-            <a:pPr algn="l"/>
-            <a:r>
-              <a:rPr sz="1200" b="1">
-                <a:solidFill>
-                  <a:srgbClr val="2E6BC0"/>
-                </a:solidFill>
-                <a:latin typeface="游ゴシック"/>
-              </a:rPr>
-              <a:t>期限</a:t>
-            </a:r>
-          </a:p>
-        </p:txBody>
-      </p:sp>
-      <p:sp>
-        <p:nvSpPr>
-          <p:cNvPr id="18" name="TextBox 17"/>
-          <p:cNvSpPr txBox="1"/>
-          <p:nvPr/>
-        </p:nvSpPr>
-        <p:spPr>
-          <a:xfrm>
-            <a:off x="9212580" y="1828800"/>
-            <a:ext cx="2308860" cy="914400"/>
-          </a:xfrm>
-          <a:prstGeom prst="rect">
-            <a:avLst/>
-          </a:prstGeom>
-          <a:noFill/>
-        </p:spPr>
-        <p:txBody>
-          <a:bodyPr wrap="square">
-            <a:spAutoFit/>
-          </a:bodyPr>
-          <a:lstStyle/>
-          <a:p>
-            <a:pPr algn="l"/>
-            <a:r>
-              <a:rPr sz="4000" b="1">
-                <a:solidFill>
-                  <a:srgbClr val="1F3A68"/>
-                </a:solidFill>
-                <a:latin typeface="游ゴシック"/>
-              </a:rPr>
-              <a:t>4-6月</a:t>
-            </a:r>
-          </a:p>
-        </p:txBody>
-      </p:sp>
-      <p:sp>
-        <p:nvSpPr>
-          <p:cNvPr id="19" name="TextBox 18"/>
-          <p:cNvSpPr txBox="1"/>
-          <p:nvPr/>
-        </p:nvSpPr>
-        <p:spPr>
-          <a:xfrm>
-            <a:off x="9212580" y="2926080"/>
-            <a:ext cx="2308860" cy="457200"/>
-          </a:xfrm>
-          <a:prstGeom prst="rect">
-            <a:avLst/>
-          </a:prstGeom>
-          <a:noFill/>
-        </p:spPr>
-        <p:txBody>
-          <a:bodyPr wrap="square">
-            <a:spAutoFit/>
-          </a:bodyPr>
-          <a:lstStyle/>
-          <a:p>
-            <a:pPr algn="l"/>
-            <a:r>
-              <a:rPr sz="1100" b="0">
-                <a:solidFill>
-                  <a:srgbClr val="6C757D"/>
-                </a:solidFill>
-                <a:latin typeface="游ゴシック"/>
-              </a:rPr>
-              <a:t>6月展示会報告</a:t>
-            </a:r>
-          </a:p>
-        </p:txBody>
-      </p:sp>
-      <p:sp>
-        <p:nvSpPr>
-          <p:cNvPr id="20" name="Rectangle 19"/>
-          <p:cNvSpPr/>
-          <p:nvPr/>
-        </p:nvSpPr>
-        <p:spPr>
-          <a:xfrm>
-            <a:off x="457200" y="4480560"/>
-            <a:ext cx="3627120" cy="1737360"/>
-          </a:xfrm>
-          <a:prstGeom prst="rect">
-            <a:avLst/>
-          </a:prstGeom>
-          <a:solidFill>
-            <a:srgbClr val="E9EFF7"/>
-          </a:solidFill>
-          <a:ln>
-            <a:noFill/>
-          </a:ln>
-        </p:spPr>
-        <p:style>
-          <a:lnRef idx="1">
-            <a:schemeClr val="accent1"/>
-          </a:lnRef>
-          <a:fillRef idx="3">
-            <a:schemeClr val="accent1"/>
-          </a:fillRef>
-          <a:effectRef idx="2">
-            <a:schemeClr val="accent1"/>
-          </a:effectRef>
-          <a:fontRef idx="minor">
-            <a:schemeClr val="lt1"/>
-          </a:fontRef>
-        </p:style>
-        <p:txBody>
-          <a:bodyPr rtlCol="0" anchor="ctr"/>
-          <a:lstStyle/>
-          <a:p>
-            <a:pPr algn="ctr"/>
-          </a:p>
-        </p:txBody>
-      </p:sp>
-      <p:sp>
-        <p:nvSpPr>
-          <p:cNvPr id="21" name="TextBox 20"/>
-          <p:cNvSpPr txBox="1"/>
-          <p:nvPr/>
-        </p:nvSpPr>
-        <p:spPr>
-          <a:xfrm>
-            <a:off x="640080" y="4663440"/>
-            <a:ext cx="3261360" cy="457200"/>
-          </a:xfrm>
-          <a:prstGeom prst="rect">
-            <a:avLst/>
-          </a:prstGeom>
-          <a:noFill/>
-        </p:spPr>
-        <p:txBody>
-          <a:bodyPr wrap="square">
-            <a:spAutoFit/>
-          </a:bodyPr>
-          <a:lstStyle/>
-          <a:p>
-            <a:pPr algn="l"/>
-            <a:r>
-              <a:rPr sz="1600" b="1">
-                <a:solidFill>
-                  <a:srgbClr val="1F3A68"/>
-                </a:solidFill>
-                <a:latin typeface="游ゴシック"/>
-              </a:rPr>
-              <a:t>①品質WG</a:t>
-            </a:r>
-          </a:p>
-        </p:txBody>
-      </p:sp>
-      <p:sp>
-        <p:nvSpPr>
-          <p:cNvPr id="22" name="TextBox 21"/>
-          <p:cNvSpPr txBox="1"/>
-          <p:nvPr/>
-        </p:nvSpPr>
-        <p:spPr>
-          <a:xfrm>
-            <a:off x="640080" y="5212080"/>
-            <a:ext cx="3261360" cy="1005840"/>
-          </a:xfrm>
-          <a:prstGeom prst="rect">
-            <a:avLst/>
-          </a:prstGeom>
-          <a:noFill/>
-        </p:spPr>
-        <p:txBody>
-          <a:bodyPr wrap="square">
-            <a:spAutoFit/>
-          </a:bodyPr>
-          <a:lstStyle/>
-          <a:p>
-            <a:pPr algn="l"/>
-            <a:r>
-              <a:rPr sz="1200" b="0">
-                <a:solidFill>
-                  <a:srgbClr val="22262E"/>
-                </a:solidFill>
-                <a:latin typeface="游ゴシック"/>
-              </a:rPr>
-              <a:t>Teams会議情報活用でPM効率化</a:t>
-            </a:r>
-          </a:p>
-        </p:txBody>
-      </p:sp>
-      <p:sp>
-        <p:nvSpPr>
-          <p:cNvPr id="23" name="Rectangle 22"/>
-          <p:cNvSpPr/>
-          <p:nvPr/>
-        </p:nvSpPr>
-        <p:spPr>
-          <a:xfrm>
-            <a:off x="4267200" y="4480560"/>
-            <a:ext cx="3627120" cy="1737360"/>
-          </a:xfrm>
-          <a:prstGeom prst="rect">
-            <a:avLst/>
-          </a:prstGeom>
-          <a:solidFill>
-            <a:srgbClr val="E9EFF7"/>
-          </a:solidFill>
-          <a:ln>
-            <a:noFill/>
-          </a:ln>
-        </p:spPr>
-        <p:style>
-          <a:lnRef idx="1">
-            <a:schemeClr val="accent1"/>
-          </a:lnRef>
-          <a:fillRef idx="3">
-            <a:schemeClr val="accent1"/>
-          </a:fillRef>
-          <a:effectRef idx="2">
-            <a:schemeClr val="accent1"/>
-          </a:effectRef>
-          <a:fontRef idx="minor">
-            <a:schemeClr val="lt1"/>
-          </a:fontRef>
-        </p:style>
-        <p:txBody>
-          <a:bodyPr rtlCol="0" anchor="ctr"/>
-          <a:lstStyle/>
-          <a:p>
-            <a:pPr algn="ctr"/>
-          </a:p>
-        </p:txBody>
-      </p:sp>
-      <p:sp>
-        <p:nvSpPr>
-          <p:cNvPr id="24" name="TextBox 23"/>
-          <p:cNvSpPr txBox="1"/>
-          <p:nvPr/>
-        </p:nvSpPr>
-        <p:spPr>
-          <a:xfrm>
-            <a:off x="4450080" y="4663440"/>
-            <a:ext cx="3261360" cy="457200"/>
-          </a:xfrm>
-          <a:prstGeom prst="rect">
-            <a:avLst/>
-          </a:prstGeom>
-          <a:noFill/>
-        </p:spPr>
-        <p:txBody>
-          <a:bodyPr wrap="square">
-            <a:spAutoFit/>
-          </a:bodyPr>
-          <a:lstStyle/>
-          <a:p>
-            <a:pPr algn="l"/>
-            <a:r>
-              <a:rPr sz="1600" b="1">
-                <a:solidFill>
-                  <a:srgbClr val="1F3A68"/>
-                </a:solidFill>
-                <a:latin typeface="游ゴシック"/>
-              </a:rPr>
-              <a:t>②展開・広報</a:t>
-            </a:r>
-          </a:p>
-        </p:txBody>
-      </p:sp>
-      <p:sp>
-        <p:nvSpPr>
-          <p:cNvPr id="25" name="TextBox 24"/>
-          <p:cNvSpPr txBox="1"/>
-          <p:nvPr/>
-        </p:nvSpPr>
-        <p:spPr>
-          <a:xfrm>
-            <a:off x="4450080" y="5212080"/>
-            <a:ext cx="3261360" cy="1005840"/>
-          </a:xfrm>
-          <a:prstGeom prst="rect">
-            <a:avLst/>
-          </a:prstGeom>
-          <a:noFill/>
-        </p:spPr>
-        <p:txBody>
-          <a:bodyPr wrap="square">
-            <a:spAutoFit/>
-          </a:bodyPr>
-          <a:lstStyle/>
-          <a:p>
-            <a:pPr algn="l"/>
-            <a:r>
-              <a:rPr sz="1200" b="0">
-                <a:solidFill>
-                  <a:srgbClr val="22262E"/>
-                </a:solidFill>
-                <a:latin typeface="游ゴシック"/>
-              </a:rPr>
-              <a:t>工程ばらし起点のトヨタ型AI全社展開</a:t>
-            </a:r>
-          </a:p>
-        </p:txBody>
-      </p:sp>
-      <p:sp>
-        <p:nvSpPr>
-          <p:cNvPr id="26" name="Rectangle 25"/>
-          <p:cNvSpPr/>
-          <p:nvPr/>
-        </p:nvSpPr>
-        <p:spPr>
-          <a:xfrm>
-            <a:off x="8077200" y="4480560"/>
-            <a:ext cx="3627120" cy="1737360"/>
-          </a:xfrm>
-          <a:prstGeom prst="rect">
-            <a:avLst/>
-          </a:prstGeom>
-          <a:solidFill>
-            <a:srgbClr val="E9EFF7"/>
-          </a:solidFill>
-          <a:ln>
-            <a:noFill/>
-          </a:ln>
-        </p:spPr>
-        <p:style>
-          <a:lnRef idx="1">
-            <a:schemeClr val="accent1"/>
-          </a:lnRef>
-          <a:fillRef idx="3">
-            <a:schemeClr val="accent1"/>
-          </a:fillRef>
-          <a:effectRef idx="2">
-            <a:schemeClr val="accent1"/>
-          </a:effectRef>
-          <a:fontRef idx="minor">
-            <a:schemeClr val="lt1"/>
-          </a:fontRef>
-        </p:style>
-        <p:txBody>
-          <a:bodyPr rtlCol="0" anchor="ctr"/>
-          <a:lstStyle/>
-          <a:p>
-            <a:pPr algn="ctr"/>
-          </a:p>
-        </p:txBody>
-      </p:sp>
-      <p:sp>
-        <p:nvSpPr>
-          <p:cNvPr id="27" name="TextBox 26"/>
-          <p:cNvSpPr txBox="1"/>
-          <p:nvPr/>
-        </p:nvSpPr>
-        <p:spPr>
-          <a:xfrm>
-            <a:off x="8260080" y="4663440"/>
-            <a:ext cx="3261360" cy="457200"/>
-          </a:xfrm>
-          <a:prstGeom prst="rect">
-            <a:avLst/>
-          </a:prstGeom>
-          <a:noFill/>
-        </p:spPr>
-        <p:txBody>
-          <a:bodyPr wrap="square">
-            <a:spAutoFit/>
-          </a:bodyPr>
-          <a:lstStyle/>
-          <a:p>
-            <a:pPr algn="l"/>
-            <a:r>
-              <a:rPr sz="1600" b="1">
-                <a:solidFill>
-                  <a:srgbClr val="1F3A68"/>
-                </a:solidFill>
-                <a:latin typeface="游ゴシック"/>
-              </a:rPr>
-              <a:t>③予算・人材</a:t>
-            </a:r>
-          </a:p>
-        </p:txBody>
-      </p:sp>
-      <p:sp>
-        <p:nvSpPr>
-          <p:cNvPr id="28" name="TextBox 27"/>
-          <p:cNvSpPr txBox="1"/>
-          <p:nvPr/>
-        </p:nvSpPr>
-        <p:spPr>
-          <a:xfrm>
-            <a:off x="8260080" y="5212080"/>
-            <a:ext cx="3261360" cy="1005840"/>
-          </a:xfrm>
-          <a:prstGeom prst="rect">
-            <a:avLst/>
-          </a:prstGeom>
-          <a:noFill/>
-        </p:spPr>
-        <p:txBody>
-          <a:bodyPr wrap="square">
-            <a:spAutoFit/>
-          </a:bodyPr>
-          <a:lstStyle/>
-          <a:p>
-            <a:pPr algn="l"/>
-            <a:r>
-              <a:rPr sz="1200" b="0">
-                <a:solidFill>
-                  <a:srgbClr val="22262E"/>
-                </a:solidFill>
-                <a:latin typeface="游ゴシック"/>
-              </a:rPr>
-              <a:t>有償ツール確保とマネージャー育成</a:t>
+              <a:t>予算確保・人材育成</a:t>
             </a:r>
           </a:p>
         </p:txBody>
@@ -4508,14 +3613,49 @@
       <p:grpSpPr/>
       <p:sp>
         <p:nvSpPr>
-          <p:cNvPr id="2" name="Rectangle 1"/>
+          <p:cNvPr id="2" name="TextBox 1"/>
+          <p:cNvSpPr txBox="1"/>
+          <p:nvPr/>
+        </p:nvSpPr>
+        <p:spPr>
+          <a:xfrm>
+            <a:off x="914400" y="822960"/>
+            <a:ext cx="10058400" cy="457200"/>
+          </a:xfrm>
+          <a:prstGeom prst="rect">
+            <a:avLst/>
+          </a:prstGeom>
+          <a:noFill/>
+        </p:spPr>
+        <p:txBody>
+          <a:bodyPr wrap="square" lIns="0" rIns="0">
+            <a:spAutoFit/>
+          </a:bodyPr>
+          <a:lstStyle/>
+          <a:p>
+            <a:pPr algn="l"/>
+            <a:r>
+              <a:rPr sz="1100" b="1">
+                <a:solidFill>
+                  <a:srgbClr val="6C757D"/>
+                </a:solidFill>
+                <a:latin typeface="游ゴシック"/>
+              </a:rPr>
+              <a:t>SECTION</a:t>
+            </a:r>
+          </a:p>
+        </p:txBody>
+      </p:sp>
+      <p:sp>
+        <p:nvSpPr>
+          <p:cNvPr id="3" name="Rectangle 2"/>
           <p:cNvSpPr/>
           <p:nvPr/>
         </p:nvSpPr>
         <p:spPr>
           <a:xfrm>
-            <a:off x="0" y="0"/>
-            <a:ext cx="12191695" cy="822960"/>
+            <a:off x="914400" y="1325880"/>
+            <a:ext cx="914400" cy="36576"/>
           </a:xfrm>
           <a:prstGeom prst="rect">
             <a:avLst/>
@@ -4551,14 +3691,14 @@
       </p:sp>
       <p:sp>
         <p:nvSpPr>
-          <p:cNvPr id="3" name="TextBox 2"/>
+          <p:cNvPr id="4" name="TextBox 3"/>
           <p:cNvSpPr txBox="1"/>
           <p:nvPr/>
         </p:nvSpPr>
         <p:spPr>
           <a:xfrm>
-            <a:off x="365760" y="182880"/>
-            <a:ext cx="11430000" cy="548640"/>
+            <a:off x="914400" y="1645920"/>
+            <a:ext cx="10332720" cy="822960"/>
           </a:xfrm>
           <a:prstGeom prst="rect">
             <a:avLst/>
@@ -4566,65 +3706,21 @@
           <a:noFill/>
         </p:spPr>
         <p:txBody>
-          <a:bodyPr wrap="none">
+          <a:bodyPr wrap="square" lIns="0" rIns="0">
             <a:spAutoFit/>
           </a:bodyPr>
           <a:lstStyle/>
           <a:p>
-            <a:r>
-              <a:rPr sz="2200" b="1">
-                <a:solidFill>
-                  <a:srgbClr val="FFFFFF"/>
+            <a:pPr algn="l"/>
+            <a:r>
+              <a:rPr sz="2800" b="1">
+                <a:solidFill>
+                  <a:srgbClr val="1F3A68"/>
                 </a:solidFill>
                 <a:latin typeface="游ゴシック"/>
               </a:rPr>
-              <a:t>アジェンダ</a:t>
-            </a:r>
-          </a:p>
-        </p:txBody>
-      </p:sp>
-      <p:sp>
-        <p:nvSpPr>
-          <p:cNvPr id="4" name="Rounded Rectangle 3"/>
-          <p:cNvSpPr/>
-          <p:nvPr/>
-        </p:nvSpPr>
-        <p:spPr>
-          <a:xfrm>
-            <a:off x="731520" y="1371600"/>
-            <a:ext cx="10698480" cy="1097280"/>
-          </a:xfrm>
-          <a:prstGeom prst="roundRect">
-            <a:avLst/>
-          </a:prstGeom>
-          <a:solidFill>
-            <a:srgbClr val="E9EFF7"/>
-          </a:solidFill>
-          <a:ln>
-            <a:solidFill>
-              <a:srgbClr val="2E6BC0"/>
-            </a:solidFill>
-          </a:ln>
-        </p:spPr>
-        <p:style>
-          <a:lnRef idx="1">
-            <a:schemeClr val="accent1"/>
-          </a:lnRef>
-          <a:fillRef idx="3">
-            <a:schemeClr val="accent1"/>
-          </a:fillRef>
-          <a:effectRef idx="2">
-            <a:schemeClr val="accent1"/>
-          </a:effectRef>
-          <a:fontRef idx="minor">
-            <a:schemeClr val="lt1"/>
-          </a:fontRef>
-        </p:style>
-        <p:txBody>
-          <a:bodyPr rtlCol="0" anchor="ctr"/>
-          <a:lstStyle/>
-          <a:p>
-            <a:pPr algn="ctr"/>
+              <a:t>品質ワーキング</a:t>
+            </a:r>
           </a:p>
         </p:txBody>
       </p:sp>
@@ -4636,8 +3732,8 @@
         </p:nvSpPr>
         <p:spPr>
           <a:xfrm>
-            <a:off x="1005840" y="1600200"/>
-            <a:ext cx="1371600" cy="731520"/>
+            <a:off x="914400" y="2926080"/>
+            <a:ext cx="182880" cy="457200"/>
           </a:xfrm>
           <a:prstGeom prst="rect">
             <a:avLst/>
@@ -4645,20 +3741,20 @@
           <a:noFill/>
         </p:spPr>
         <p:txBody>
-          <a:bodyPr wrap="square">
+          <a:bodyPr wrap="square" lIns="0" rIns="0">
             <a:spAutoFit/>
           </a:bodyPr>
           <a:lstStyle/>
           <a:p>
             <a:pPr algn="l"/>
             <a:r>
-              <a:rPr sz="4400" b="1">
+              <a:rPr sz="1400" b="0">
                 <a:solidFill>
                   <a:srgbClr val="2E6BC0"/>
                 </a:solidFill>
                 <a:latin typeface="游ゴシック"/>
               </a:rPr>
-              <a:t>1</a:t>
+              <a:t>—</a:t>
             </a:r>
           </a:p>
         </p:txBody>
@@ -4671,8 +3767,8 @@
         </p:nvSpPr>
         <p:spPr>
           <a:xfrm>
-            <a:off x="2194560" y="1737360"/>
-            <a:ext cx="9144000" cy="548640"/>
+            <a:off x="1188720" y="2926080"/>
+            <a:ext cx="5760720" cy="640080"/>
           </a:xfrm>
           <a:prstGeom prst="rect">
             <a:avLst/>
@@ -4680,66 +3776,56 @@
           <a:noFill/>
         </p:spPr>
         <p:txBody>
-          <a:bodyPr wrap="square">
+          <a:bodyPr wrap="square" lIns="0" rIns="0">
             <a:spAutoFit/>
           </a:bodyPr>
           <a:lstStyle/>
           <a:p>
             <a:pPr algn="l"/>
             <a:r>
-              <a:rPr sz="1800" b="1">
+              <a:rPr sz="1300" b="0">
                 <a:solidFill>
                   <a:srgbClr val="22262E"/>
                 </a:solidFill>
                 <a:latin typeface="游ゴシック"/>
               </a:rPr>
-              <a:t>品質ワーキングの進捗報告</a:t>
-            </a:r>
-          </a:p>
-        </p:txBody>
-      </p:sp>
-      <p:sp>
-        <p:nvSpPr>
-          <p:cNvPr id="7" name="Rounded Rectangle 6"/>
-          <p:cNvSpPr/>
-          <p:nvPr/>
-        </p:nvSpPr>
-        <p:spPr>
-          <a:xfrm>
-            <a:off x="731520" y="2743200"/>
-            <a:ext cx="10698480" cy="1097280"/>
-          </a:xfrm>
-          <a:prstGeom prst="roundRect">
-            <a:avLst/>
-          </a:prstGeom>
-          <a:solidFill>
-            <a:srgbClr val="E9EFF7"/>
-          </a:solidFill>
-          <a:ln>
-            <a:solidFill>
-              <a:srgbClr val="2E6BC0"/>
-            </a:solidFill>
-          </a:ln>
-        </p:spPr>
-        <p:style>
-          <a:lnRef idx="1">
-            <a:schemeClr val="accent1"/>
-          </a:lnRef>
-          <a:fillRef idx="3">
-            <a:schemeClr val="accent1"/>
-          </a:fillRef>
-          <a:effectRef idx="2">
-            <a:schemeClr val="accent1"/>
-          </a:effectRef>
-          <a:fontRef idx="minor">
-            <a:schemeClr val="lt1"/>
-          </a:fontRef>
-        </p:style>
-        <p:txBody>
-          <a:bodyPr rtlCol="0" anchor="ctr"/>
-          <a:lstStyle/>
-          <a:p>
-            <a:pPr algn="ctr"/>
+              <a:t>テーマ: Teams会議情報を活用したPM効率化</a:t>
+            </a:r>
+          </a:p>
+        </p:txBody>
+      </p:sp>
+      <p:sp>
+        <p:nvSpPr>
+          <p:cNvPr id="7" name="TextBox 6"/>
+          <p:cNvSpPr txBox="1"/>
+          <p:nvPr/>
+        </p:nvSpPr>
+        <p:spPr>
+          <a:xfrm>
+            <a:off x="914400" y="3611880"/>
+            <a:ext cx="182880" cy="457200"/>
+          </a:xfrm>
+          <a:prstGeom prst="rect">
+            <a:avLst/>
+          </a:prstGeom>
+          <a:noFill/>
+        </p:spPr>
+        <p:txBody>
+          <a:bodyPr wrap="square" lIns="0" rIns="0">
+            <a:spAutoFit/>
+          </a:bodyPr>
+          <a:lstStyle/>
+          <a:p>
+            <a:pPr algn="l"/>
+            <a:r>
+              <a:rPr sz="1400" b="0">
+                <a:solidFill>
+                  <a:srgbClr val="2E6BC0"/>
+                </a:solidFill>
+                <a:latin typeface="游ゴシック"/>
+              </a:rPr>
+              <a:t>—</a:t>
+            </a:r>
           </a:p>
         </p:txBody>
       </p:sp>
@@ -4751,8 +3837,8 @@
         </p:nvSpPr>
         <p:spPr>
           <a:xfrm>
-            <a:off x="1005840" y="2971800"/>
-            <a:ext cx="1371600" cy="731520"/>
+            <a:off x="1188720" y="3611880"/>
+            <a:ext cx="5760720" cy="640080"/>
           </a:xfrm>
           <a:prstGeom prst="rect">
             <a:avLst/>
@@ -4760,20 +3846,20 @@
           <a:noFill/>
         </p:spPr>
         <p:txBody>
-          <a:bodyPr wrap="square">
+          <a:bodyPr wrap="square" lIns="0" rIns="0">
             <a:spAutoFit/>
           </a:bodyPr>
           <a:lstStyle/>
           <a:p>
             <a:pPr algn="l"/>
             <a:r>
-              <a:rPr sz="4400" b="1">
-                <a:solidFill>
-                  <a:srgbClr val="2E6BC0"/>
+              <a:rPr sz="1300" b="0">
+                <a:solidFill>
+                  <a:srgbClr val="22262E"/>
                 </a:solidFill>
                 <a:latin typeface="游ゴシック"/>
               </a:rPr>
-              <a:t>2</a:t>
+              <a:t>議事録アシスタントの文字起こし精度が課題</a:t>
             </a:r>
           </a:p>
         </p:txBody>
@@ -4786,8 +3872,8 @@
         </p:nvSpPr>
         <p:spPr>
           <a:xfrm>
-            <a:off x="2194560" y="3108960"/>
-            <a:ext cx="9144000" cy="548640"/>
+            <a:off x="914400" y="4297680"/>
+            <a:ext cx="182880" cy="457200"/>
           </a:xfrm>
           <a:prstGeom prst="rect">
             <a:avLst/>
@@ -4795,66 +3881,56 @@
           <a:noFill/>
         </p:spPr>
         <p:txBody>
-          <a:bodyPr wrap="square">
+          <a:bodyPr wrap="square" lIns="0" rIns="0">
             <a:spAutoFit/>
           </a:bodyPr>
           <a:lstStyle/>
           <a:p>
             <a:pPr algn="l"/>
             <a:r>
-              <a:rPr sz="1800" b="1">
-                <a:solidFill>
-                  <a:srgbClr val="22262E"/>
+              <a:rPr sz="1400" b="0">
+                <a:solidFill>
+                  <a:srgbClr val="2E6BC0"/>
                 </a:solidFill>
                 <a:latin typeface="游ゴシック"/>
               </a:rPr>
-              <a:t>展開・広報ワーキングの進捗報告</a:t>
-            </a:r>
-          </a:p>
-        </p:txBody>
-      </p:sp>
-      <p:sp>
-        <p:nvSpPr>
-          <p:cNvPr id="10" name="Rounded Rectangle 9"/>
-          <p:cNvSpPr/>
-          <p:nvPr/>
-        </p:nvSpPr>
-        <p:spPr>
-          <a:xfrm>
-            <a:off x="731520" y="4114800"/>
-            <a:ext cx="10698480" cy="1097280"/>
-          </a:xfrm>
-          <a:prstGeom prst="roundRect">
-            <a:avLst/>
-          </a:prstGeom>
-          <a:solidFill>
-            <a:srgbClr val="E9EFF7"/>
-          </a:solidFill>
-          <a:ln>
-            <a:solidFill>
-              <a:srgbClr val="2E6BC0"/>
-            </a:solidFill>
-          </a:ln>
-        </p:spPr>
-        <p:style>
-          <a:lnRef idx="1">
-            <a:schemeClr val="accent1"/>
-          </a:lnRef>
-          <a:fillRef idx="3">
-            <a:schemeClr val="accent1"/>
-          </a:fillRef>
-          <a:effectRef idx="2">
-            <a:schemeClr val="accent1"/>
-          </a:effectRef>
-          <a:fontRef idx="minor">
-            <a:schemeClr val="lt1"/>
-          </a:fontRef>
-        </p:style>
-        <p:txBody>
-          <a:bodyPr rtlCol="0" anchor="ctr"/>
-          <a:lstStyle/>
-          <a:p>
-            <a:pPr algn="ctr"/>
+              <a:t>—</a:t>
+            </a:r>
+          </a:p>
+        </p:txBody>
+      </p:sp>
+      <p:sp>
+        <p:nvSpPr>
+          <p:cNvPr id="10" name="TextBox 9"/>
+          <p:cNvSpPr txBox="1"/>
+          <p:nvPr/>
+        </p:nvSpPr>
+        <p:spPr>
+          <a:xfrm>
+            <a:off x="1188720" y="4297680"/>
+            <a:ext cx="5760720" cy="640080"/>
+          </a:xfrm>
+          <a:prstGeom prst="rect">
+            <a:avLst/>
+          </a:prstGeom>
+          <a:noFill/>
+        </p:spPr>
+        <p:txBody>
+          <a:bodyPr wrap="square" lIns="0" rIns="0">
+            <a:spAutoFit/>
+          </a:bodyPr>
+          <a:lstStyle/>
+          <a:p>
+            <a:pPr algn="l"/>
+            <a:r>
+              <a:rPr sz="1300" b="0">
+                <a:solidFill>
+                  <a:srgbClr val="22262E"/>
+                </a:solidFill>
+                <a:latin typeface="游ゴシック"/>
+              </a:rPr>
+              <a:t>Aqua Voice等で再文字起こしを試験</a:t>
+            </a:r>
           </a:p>
         </p:txBody>
       </p:sp>
@@ -4866,8 +3942,8 @@
         </p:nvSpPr>
         <p:spPr>
           <a:xfrm>
-            <a:off x="1005840" y="4343400"/>
-            <a:ext cx="1371600" cy="731520"/>
+            <a:off x="914400" y="4983480"/>
+            <a:ext cx="182880" cy="457200"/>
           </a:xfrm>
           <a:prstGeom prst="rect">
             <a:avLst/>
@@ -4875,20 +3951,20 @@
           <a:noFill/>
         </p:spPr>
         <p:txBody>
-          <a:bodyPr wrap="square">
+          <a:bodyPr wrap="square" lIns="0" rIns="0">
             <a:spAutoFit/>
           </a:bodyPr>
           <a:lstStyle/>
           <a:p>
             <a:pPr algn="l"/>
             <a:r>
-              <a:rPr sz="4400" b="1">
+              <a:rPr sz="1400" b="0">
                 <a:solidFill>
                   <a:srgbClr val="2E6BC0"/>
                 </a:solidFill>
                 <a:latin typeface="游ゴシック"/>
               </a:rPr>
-              <a:t>3</a:t>
+              <a:t>—</a:t>
             </a:r>
           </a:p>
         </p:txBody>
@@ -4901,8 +3977,8 @@
         </p:nvSpPr>
         <p:spPr>
           <a:xfrm>
-            <a:off x="2194560" y="4480560"/>
-            <a:ext cx="9144000" cy="548640"/>
+            <a:off x="1188720" y="4983480"/>
+            <a:ext cx="5760720" cy="640080"/>
           </a:xfrm>
           <a:prstGeom prst="rect">
             <a:avLst/>
@@ -4910,20 +3986,79 @@
           <a:noFill/>
         </p:spPr>
         <p:txBody>
-          <a:bodyPr wrap="square">
+          <a:bodyPr wrap="square" lIns="0" rIns="0">
             <a:spAutoFit/>
           </a:bodyPr>
           <a:lstStyle/>
           <a:p>
             <a:pPr algn="l"/>
             <a:r>
-              <a:rPr sz="1800" b="1">
+              <a:rPr sz="1300" b="0">
                 <a:solidFill>
                   <a:srgbClr val="22262E"/>
                 </a:solidFill>
                 <a:latin typeface="游ゴシック"/>
               </a:rPr>
-              <a:t>その他共有事項（予算確保、人材育成）</a:t>
+              <a:t>Googleハッカソンと知見を相互共有</a:t>
+            </a:r>
+          </a:p>
+        </p:txBody>
+      </p:sp>
+      <p:pic>
+        <p:nvPicPr>
+          <p:cNvPr id="13" name="Picture 12" descr="c_quality.png"/>
+          <p:cNvPicPr>
+            <a:picLocks noChangeAspect="1"/>
+          </p:cNvPicPr>
+          <p:nvPr/>
+        </p:nvPicPr>
+        <p:blipFill>
+          <a:blip r:embed="rId2"/>
+          <a:stretch>
+            <a:fillRect/>
+          </a:stretch>
+        </p:blipFill>
+        <p:spPr>
+          <a:xfrm>
+            <a:off x="7315200" y="2560320"/>
+            <a:ext cx="4389120" cy="2387325"/>
+          </a:xfrm>
+          <a:prstGeom prst="rect">
+            <a:avLst/>
+          </a:prstGeom>
+        </p:spPr>
+      </p:pic>
+      <p:sp>
+        <p:nvSpPr>
+          <p:cNvPr id="14" name="TextBox 13"/>
+          <p:cNvSpPr txBox="1"/>
+          <p:nvPr/>
+        </p:nvSpPr>
+        <p:spPr>
+          <a:xfrm>
+            <a:off x="7315200" y="5943600"/>
+            <a:ext cx="4389120" cy="548640"/>
+          </a:xfrm>
+          <a:prstGeom prst="rect">
+            <a:avLst/>
+          </a:prstGeom>
+          <a:noFill/>
+        </p:spPr>
+        <p:txBody>
+          <a:bodyPr wrap="square" lIns="0" rIns="0">
+            <a:spAutoFit/>
+          </a:bodyPr>
+          <a:lstStyle/>
+          <a:p>
+            <a:pPr algn="l"/>
+            <a:r>
+              <a:rPr sz="900" b="0">
+                <a:solidFill>
+                  <a:srgbClr val="6C757D"/>
+                </a:solidFill>
+                <a:latin typeface="游ゴシック"/>
+              </a:rPr>
+              <a:t>文字起こしが-32pt。最大のボトルネック。</a:t>
             </a:r>
           </a:p>
         </p:txBody>
@@ -4948,14 +4083,49 @@
       <p:grpSpPr/>
       <p:sp>
         <p:nvSpPr>
-          <p:cNvPr id="2" name="Rectangle 1"/>
+          <p:cNvPr id="2" name="TextBox 1"/>
+          <p:cNvSpPr txBox="1"/>
+          <p:nvPr/>
+        </p:nvSpPr>
+        <p:spPr>
+          <a:xfrm>
+            <a:off x="914400" y="822960"/>
+            <a:ext cx="10058400" cy="457200"/>
+          </a:xfrm>
+          <a:prstGeom prst="rect">
+            <a:avLst/>
+          </a:prstGeom>
+          <a:noFill/>
+        </p:spPr>
+        <p:txBody>
+          <a:bodyPr wrap="square" lIns="0" rIns="0">
+            <a:spAutoFit/>
+          </a:bodyPr>
+          <a:lstStyle/>
+          <a:p>
+            <a:pPr algn="l"/>
+            <a:r>
+              <a:rPr sz="1100" b="1">
+                <a:solidFill>
+                  <a:srgbClr val="6C757D"/>
+                </a:solidFill>
+                <a:latin typeface="游ゴシック"/>
+              </a:rPr>
+              <a:t>SECTION</a:t>
+            </a:r>
+          </a:p>
+        </p:txBody>
+      </p:sp>
+      <p:sp>
+        <p:nvSpPr>
+          <p:cNvPr id="3" name="Rectangle 2"/>
           <p:cNvSpPr/>
           <p:nvPr/>
         </p:nvSpPr>
         <p:spPr>
           <a:xfrm>
-            <a:off x="0" y="0"/>
-            <a:ext cx="12191695" cy="822960"/>
+            <a:off x="914400" y="1325880"/>
+            <a:ext cx="914400" cy="36576"/>
           </a:xfrm>
           <a:prstGeom prst="rect">
             <a:avLst/>
@@ -4991,14 +4161,14 @@
       </p:sp>
       <p:sp>
         <p:nvSpPr>
-          <p:cNvPr id="3" name="TextBox 2"/>
+          <p:cNvPr id="4" name="TextBox 3"/>
           <p:cNvSpPr txBox="1"/>
           <p:nvPr/>
         </p:nvSpPr>
         <p:spPr>
           <a:xfrm>
-            <a:off x="365760" y="182880"/>
-            <a:ext cx="11430000" cy="548640"/>
+            <a:off x="914400" y="1645920"/>
+            <a:ext cx="10332720" cy="822960"/>
           </a:xfrm>
           <a:prstGeom prst="rect">
             <a:avLst/>
@@ -5006,33 +4176,34 @@
           <a:noFill/>
         </p:spPr>
         <p:txBody>
-          <a:bodyPr wrap="none">
+          <a:bodyPr wrap="square" lIns="0" rIns="0">
             <a:spAutoFit/>
           </a:bodyPr>
           <a:lstStyle/>
           <a:p>
-            <a:r>
-              <a:rPr sz="2200" b="1">
-                <a:solidFill>
-                  <a:srgbClr val="FFFFFF"/>
+            <a:pPr algn="l"/>
+            <a:r>
+              <a:rPr sz="2800" b="1">
+                <a:solidFill>
+                  <a:srgbClr val="1F3A68"/>
                 </a:solidFill>
                 <a:latin typeface="游ゴシック"/>
               </a:rPr>
-              <a:t>1. 品質ワーキング</a:t>
-            </a:r>
-          </a:p>
-        </p:txBody>
-      </p:sp>
-      <p:sp>
-        <p:nvSpPr>
-          <p:cNvPr id="4" name="TextBox 3"/>
+              <a:t>展開・広報ワーキング</a:t>
+            </a:r>
+          </a:p>
+        </p:txBody>
+      </p:sp>
+      <p:sp>
+        <p:nvSpPr>
+          <p:cNvPr id="5" name="TextBox 4"/>
           <p:cNvSpPr txBox="1"/>
           <p:nvPr/>
         </p:nvSpPr>
         <p:spPr>
           <a:xfrm>
-            <a:off x="548640" y="1097280"/>
-            <a:ext cx="11430000" cy="548640"/>
+            <a:off x="914400" y="3108960"/>
+            <a:ext cx="182880" cy="457200"/>
           </a:xfrm>
           <a:prstGeom prst="rect">
             <a:avLst/>
@@ -5040,64 +4211,21 @@
           <a:noFill/>
         </p:spPr>
         <p:txBody>
-          <a:bodyPr wrap="square">
+          <a:bodyPr wrap="square" lIns="0" rIns="0">
             <a:spAutoFit/>
           </a:bodyPr>
           <a:lstStyle/>
           <a:p>
             <a:pPr algn="l"/>
             <a:r>
-              <a:rPr sz="1500" b="1">
+              <a:rPr sz="1600" b="0">
                 <a:solidFill>
                   <a:srgbClr val="2E6BC0"/>
                 </a:solidFill>
                 <a:latin typeface="游ゴシック"/>
               </a:rPr>
-              <a:t>▼ テーマ:「Teams会議情報を活用したプロジェクト管理の効率化」</a:t>
-            </a:r>
-          </a:p>
-        </p:txBody>
-      </p:sp>
-      <p:sp>
-        <p:nvSpPr>
-          <p:cNvPr id="5" name="Rectangle 4"/>
-          <p:cNvSpPr/>
-          <p:nvPr/>
-        </p:nvSpPr>
-        <p:spPr>
-          <a:xfrm>
-            <a:off x="457200" y="1737360"/>
-            <a:ext cx="5303520" cy="4754880"/>
-          </a:xfrm>
-          <a:prstGeom prst="rect">
-            <a:avLst/>
-          </a:prstGeom>
-          <a:solidFill>
-            <a:srgbClr val="E9EFF7"/>
-          </a:solidFill>
-          <a:ln>
-            <a:noFill/>
-          </a:ln>
-        </p:spPr>
-        <p:style>
-          <a:lnRef idx="1">
-            <a:schemeClr val="accent1"/>
-          </a:lnRef>
-          <a:fillRef idx="3">
-            <a:schemeClr val="accent1"/>
-          </a:fillRef>
-          <a:effectRef idx="2">
-            <a:schemeClr val="accent1"/>
-          </a:effectRef>
-          <a:fontRef idx="minor">
-            <a:schemeClr val="lt1"/>
-          </a:fontRef>
-        </p:style>
-        <p:txBody>
-          <a:bodyPr rtlCol="0" anchor="ctr"/>
-          <a:lstStyle/>
-          <a:p>
-            <a:pPr algn="ctr"/>
+              <a:t>—</a:t>
+            </a:r>
           </a:p>
         </p:txBody>
       </p:sp>
@@ -5109,8 +4237,8 @@
         </p:nvSpPr>
         <p:spPr>
           <a:xfrm>
-            <a:off x="640080" y="1920240"/>
-            <a:ext cx="5029200" cy="548640"/>
+            <a:off x="1371600" y="3108960"/>
+            <a:ext cx="9601200" cy="640080"/>
           </a:xfrm>
           <a:prstGeom prst="rect">
             <a:avLst/>
@@ -5118,20 +4246,20 @@
           <a:noFill/>
         </p:spPr>
         <p:txBody>
-          <a:bodyPr wrap="square">
+          <a:bodyPr wrap="square" lIns="0" rIns="0">
             <a:spAutoFit/>
           </a:bodyPr>
           <a:lstStyle/>
           <a:p>
             <a:pPr algn="l"/>
             <a:r>
-              <a:rPr sz="1100" b="0">
+              <a:rPr sz="1600" b="0">
                 <a:solidFill>
                   <a:srgbClr val="22262E"/>
                 </a:solidFill>
                 <a:latin typeface="游ゴシック"/>
               </a:rPr>
-              <a:t>● 議事録アシスタント・RAG活用を軸に活動開始</a:t>
+              <a:t>PCY斎藤さん参画（Copilot教育）</a:t>
             </a:r>
           </a:p>
         </p:txBody>
@@ -5144,8 +4272,8 @@
         </p:nvSpPr>
         <p:spPr>
           <a:xfrm>
-            <a:off x="640080" y="2560320"/>
-            <a:ext cx="5029200" cy="548640"/>
+            <a:off x="914400" y="3886200"/>
+            <a:ext cx="182880" cy="457200"/>
           </a:xfrm>
           <a:prstGeom prst="rect">
             <a:avLst/>
@@ -5153,20 +4281,20 @@
           <a:noFill/>
         </p:spPr>
         <p:txBody>
-          <a:bodyPr wrap="square">
+          <a:bodyPr wrap="square" lIns="0" rIns="0">
             <a:spAutoFit/>
           </a:bodyPr>
           <a:lstStyle/>
           <a:p>
             <a:pPr algn="l"/>
             <a:r>
-              <a:rPr sz="1100" b="0">
-                <a:solidFill>
-                  <a:srgbClr val="22262E"/>
+              <a:rPr sz="1600" b="0">
+                <a:solidFill>
+                  <a:srgbClr val="2E6BC0"/>
                 </a:solidFill>
                 <a:latin typeface="游ゴシック"/>
               </a:rPr>
-              <a:t>● Googleハッカソン「AIエージェントによる会議準備効率化」と知見を相互共有</a:t>
+              <a:t>—</a:t>
             </a:r>
           </a:p>
         </p:txBody>
@@ -5179,8 +4307,8 @@
         </p:nvSpPr>
         <p:spPr>
           <a:xfrm>
-            <a:off x="640080" y="3200400"/>
-            <a:ext cx="5029200" cy="548640"/>
+            <a:off x="1371600" y="3886200"/>
+            <a:ext cx="9601200" cy="640080"/>
           </a:xfrm>
           <a:prstGeom prst="rect">
             <a:avLst/>
@@ -5188,20 +4316,20 @@
           <a:noFill/>
         </p:spPr>
         <p:txBody>
-          <a:bodyPr wrap="square">
+          <a:bodyPr wrap="square" lIns="0" rIns="0">
             <a:spAutoFit/>
           </a:bodyPr>
           <a:lstStyle/>
           <a:p>
             <a:pPr algn="l"/>
             <a:r>
-              <a:rPr sz="1100" b="0">
+              <a:rPr sz="1600" b="0">
                 <a:solidFill>
                   <a:srgbClr val="22262E"/>
                 </a:solidFill>
                 <a:latin typeface="游ゴシック"/>
               </a:rPr>
-              <a:t>● 【課題】文字起こし精度（特に漢字変換）が要約品質を下げる</a:t>
+              <a:t>「工程ばらし起点のAI活用」をTPS推進部と全社標準化</a:t>
             </a:r>
           </a:p>
         </p:txBody>
@@ -5214,8 +4342,8 @@
         </p:nvSpPr>
         <p:spPr>
           <a:xfrm>
-            <a:off x="640080" y="3840479"/>
-            <a:ext cx="5029200" cy="548640"/>
+            <a:off x="914400" y="4663440"/>
+            <a:ext cx="182880" cy="457200"/>
           </a:xfrm>
           <a:prstGeom prst="rect">
             <a:avLst/>
@@ -5223,20 +4351,20 @@
           <a:noFill/>
         </p:spPr>
         <p:txBody>
-          <a:bodyPr wrap="square">
+          <a:bodyPr wrap="square" lIns="0" rIns="0">
             <a:spAutoFit/>
           </a:bodyPr>
           <a:lstStyle/>
           <a:p>
             <a:pPr algn="l"/>
             <a:r>
-              <a:rPr sz="1100" b="0">
-                <a:solidFill>
-                  <a:srgbClr val="22262E"/>
+              <a:rPr sz="1600" b="0">
+                <a:solidFill>
+                  <a:srgbClr val="2E6BC0"/>
                 </a:solidFill>
                 <a:latin typeface="游ゴシック"/>
               </a:rPr>
-              <a:t>● 【改善案】MP4→Aqua Voice等での再文字起こし</a:t>
+              <a:t>—</a:t>
             </a:r>
           </a:p>
         </p:txBody>
@@ -5249,8 +4377,8 @@
         </p:nvSpPr>
         <p:spPr>
           <a:xfrm>
-            <a:off x="640080" y="4480560"/>
-            <a:ext cx="5029200" cy="548640"/>
+            <a:off x="1371600" y="4663440"/>
+            <a:ext cx="9601200" cy="640080"/>
           </a:xfrm>
           <a:prstGeom prst="rect">
             <a:avLst/>
@@ -5258,20 +4386,20 @@
           <a:noFill/>
         </p:spPr>
         <p:txBody>
-          <a:bodyPr wrap="square">
+          <a:bodyPr wrap="square" lIns="0" rIns="0">
             <a:spAutoFit/>
           </a:bodyPr>
           <a:lstStyle/>
           <a:p>
             <a:pPr algn="l"/>
             <a:r>
-              <a:rPr sz="1100" b="0">
+              <a:rPr sz="1600" b="0">
                 <a:solidFill>
                   <a:srgbClr val="22262E"/>
                 </a:solidFill>
                 <a:latin typeface="游ゴシック"/>
               </a:rPr>
-              <a:t>● 【改善案】発言者属性のメモリ機能で文脈理解を強化</a:t>
+              <a:t>経営層要請: 効果明確化・2ヶ月毎フォロー</a:t>
             </a:r>
           </a:p>
         </p:txBody>
@@ -5284,8 +4412,8 @@
         </p:nvSpPr>
         <p:spPr>
           <a:xfrm>
-            <a:off x="640080" y="5120640"/>
-            <a:ext cx="5029200" cy="548640"/>
+            <a:off x="914400" y="5440679"/>
+            <a:ext cx="182880" cy="457200"/>
           </a:xfrm>
           <a:prstGeom prst="rect">
             <a:avLst/>
@@ -5293,58 +4421,34 @@
           <a:noFill/>
         </p:spPr>
         <p:txBody>
-          <a:bodyPr wrap="square">
+          <a:bodyPr wrap="square" lIns="0" rIns="0">
             <a:spAutoFit/>
           </a:bodyPr>
           <a:lstStyle/>
           <a:p>
             <a:pPr algn="l"/>
             <a:r>
-              <a:rPr sz="1100" b="0">
-                <a:solidFill>
-                  <a:srgbClr val="22262E"/>
+              <a:rPr sz="1600" b="0">
+                <a:solidFill>
+                  <a:srgbClr val="2E6BC0"/>
                 </a:solidFill>
                 <a:latin typeface="游ゴシック"/>
               </a:rPr>
-              <a:t>● Google環境で高精度文字起こしを試験するのが有効（上地）</a:t>
-            </a:r>
-          </a:p>
-        </p:txBody>
-      </p:sp>
-      <p:pic>
-        <p:nvPicPr>
-          <p:cNvPr id="12" name="Picture 11" descr="c_quality.png"/>
-          <p:cNvPicPr>
-            <a:picLocks noChangeAspect="1"/>
-          </p:cNvPicPr>
-          <p:nvPr/>
-        </p:nvPicPr>
-        <p:blipFill>
-          <a:blip r:embed="rId2"/>
-          <a:stretch>
-            <a:fillRect/>
-          </a:stretch>
-        </p:blipFill>
-        <p:spPr>
-          <a:xfrm>
-            <a:off x="6035040" y="1737360"/>
-            <a:ext cx="5943600" cy="3232836"/>
-          </a:xfrm>
-          <a:prstGeom prst="rect">
-            <a:avLst/>
-          </a:prstGeom>
-        </p:spPr>
-      </p:pic>
-      <p:sp>
-        <p:nvSpPr>
-          <p:cNvPr id="13" name="TextBox 12"/>
+              <a:t>—</a:t>
+            </a:r>
+          </a:p>
+        </p:txBody>
+      </p:sp>
+      <p:sp>
+        <p:nvSpPr>
+          <p:cNvPr id="12" name="TextBox 11"/>
           <p:cNvSpPr txBox="1"/>
           <p:nvPr/>
         </p:nvSpPr>
         <p:spPr>
           <a:xfrm>
-            <a:off x="6035040" y="6309360"/>
-            <a:ext cx="5943600" cy="365760"/>
+            <a:off x="1371600" y="5440679"/>
+            <a:ext cx="9601200" cy="640080"/>
           </a:xfrm>
           <a:prstGeom prst="rect">
             <a:avLst/>
@@ -5352,20 +4456,20 @@
           <a:noFill/>
         </p:spPr>
         <p:txBody>
-          <a:bodyPr wrap="square">
+          <a:bodyPr wrap="square" lIns="0" rIns="0">
             <a:spAutoFit/>
           </a:bodyPr>
           <a:lstStyle/>
           <a:p>
             <a:pPr algn="l"/>
             <a:r>
-              <a:rPr sz="1000" b="0">
-                <a:solidFill>
-                  <a:srgbClr val="6C757D"/>
+              <a:rPr sz="1600" b="0">
+                <a:solidFill>
+                  <a:srgbClr val="22262E"/>
                 </a:solidFill>
                 <a:latin typeface="游ゴシック"/>
               </a:rPr>
-              <a:t>▸ 最大ギャップは文字起こし精度の-32pt。Aqua Voice等の導入効果が期待大。</a:t>
+              <a:t>6月AI活用展示会で進捗報告</a:t>
             </a:r>
           </a:p>
         </p:txBody>
@@ -5390,14 +4494,49 @@
       <p:grpSpPr/>
       <p:sp>
         <p:nvSpPr>
-          <p:cNvPr id="2" name="Rectangle 1"/>
+          <p:cNvPr id="2" name="TextBox 1"/>
+          <p:cNvSpPr txBox="1"/>
+          <p:nvPr/>
+        </p:nvSpPr>
+        <p:spPr>
+          <a:xfrm>
+            <a:off x="914400" y="822960"/>
+            <a:ext cx="10058400" cy="457200"/>
+          </a:xfrm>
+          <a:prstGeom prst="rect">
+            <a:avLst/>
+          </a:prstGeom>
+          <a:noFill/>
+        </p:spPr>
+        <p:txBody>
+          <a:bodyPr wrap="square" lIns="0" rIns="0">
+            <a:spAutoFit/>
+          </a:bodyPr>
+          <a:lstStyle/>
+          <a:p>
+            <a:pPr algn="l"/>
+            <a:r>
+              <a:rPr sz="1100" b="1">
+                <a:solidFill>
+                  <a:srgbClr val="6C757D"/>
+                </a:solidFill>
+                <a:latin typeface="游ゴシック"/>
+              </a:rPr>
+              <a:t>SECTION</a:t>
+            </a:r>
+          </a:p>
+        </p:txBody>
+      </p:sp>
+      <p:sp>
+        <p:nvSpPr>
+          <p:cNvPr id="3" name="Rectangle 2"/>
           <p:cNvSpPr/>
           <p:nvPr/>
         </p:nvSpPr>
         <p:spPr>
           <a:xfrm>
-            <a:off x="0" y="0"/>
-            <a:ext cx="12191695" cy="822960"/>
+            <a:off x="914400" y="1325880"/>
+            <a:ext cx="914400" cy="36576"/>
           </a:xfrm>
           <a:prstGeom prst="rect">
             <a:avLst/>
@@ -5433,14 +4572,14 @@
       </p:sp>
       <p:sp>
         <p:nvSpPr>
-          <p:cNvPr id="3" name="TextBox 2"/>
+          <p:cNvPr id="4" name="TextBox 3"/>
           <p:cNvSpPr txBox="1"/>
           <p:nvPr/>
         </p:nvSpPr>
         <p:spPr>
           <a:xfrm>
-            <a:off x="365760" y="182880"/>
-            <a:ext cx="11430000" cy="548640"/>
+            <a:off x="914400" y="1645920"/>
+            <a:ext cx="10332720" cy="822960"/>
           </a:xfrm>
           <a:prstGeom prst="rect">
             <a:avLst/>
@@ -5448,33 +4587,34 @@
           <a:noFill/>
         </p:spPr>
         <p:txBody>
-          <a:bodyPr wrap="none">
+          <a:bodyPr wrap="square" lIns="0" rIns="0">
             <a:spAutoFit/>
           </a:bodyPr>
           <a:lstStyle/>
           <a:p>
-            <a:r>
-              <a:rPr sz="2200" b="1">
-                <a:solidFill>
-                  <a:srgbClr val="FFFFFF"/>
+            <a:pPr algn="l"/>
+            <a:r>
+              <a:rPr sz="2800" b="1">
+                <a:solidFill>
+                  <a:srgbClr val="1F3A68"/>
                 </a:solidFill>
                 <a:latin typeface="游ゴシック"/>
               </a:rPr>
-              <a:t>2. 展開・広報ワーキング</a:t>
-            </a:r>
-          </a:p>
-        </p:txBody>
-      </p:sp>
-      <p:sp>
-        <p:nvSpPr>
-          <p:cNvPr id="4" name="TextBox 3"/>
+              <a:t>予算確保・人材育成</a:t>
+            </a:r>
+          </a:p>
+        </p:txBody>
+      </p:sp>
+      <p:sp>
+        <p:nvSpPr>
+          <p:cNvPr id="5" name="TextBox 4"/>
           <p:cNvSpPr txBox="1"/>
           <p:nvPr/>
         </p:nvSpPr>
         <p:spPr>
           <a:xfrm>
-            <a:off x="548640" y="1097280"/>
-            <a:ext cx="11430000" cy="548640"/>
+            <a:off x="914400" y="3108960"/>
+            <a:ext cx="182880" cy="457200"/>
           </a:xfrm>
           <a:prstGeom prst="rect">
             <a:avLst/>
@@ -5482,64 +4622,21 @@
           <a:noFill/>
         </p:spPr>
         <p:txBody>
-          <a:bodyPr wrap="square">
+          <a:bodyPr wrap="square" lIns="0" rIns="0">
             <a:spAutoFit/>
           </a:bodyPr>
           <a:lstStyle/>
           <a:p>
             <a:pPr algn="l"/>
             <a:r>
-              <a:rPr sz="1500" b="1">
+              <a:rPr sz="1600" b="0">
                 <a:solidFill>
                   <a:srgbClr val="2E6BC0"/>
                 </a:solidFill>
                 <a:latin typeface="游ゴシック"/>
               </a:rPr>
-              <a:t>▼ PCY斎藤さん参画。Copilot教育のライブ感・期限設定が鍵</a:t>
-            </a:r>
-          </a:p>
-        </p:txBody>
-      </p:sp>
-      <p:sp>
-        <p:nvSpPr>
-          <p:cNvPr id="5" name="Rectangle 4"/>
-          <p:cNvSpPr/>
-          <p:nvPr/>
-        </p:nvSpPr>
-        <p:spPr>
-          <a:xfrm>
-            <a:off x="548640" y="1737360"/>
-            <a:ext cx="11064240" cy="4754880"/>
-          </a:xfrm>
-          <a:prstGeom prst="rect">
-            <a:avLst/>
-          </a:prstGeom>
-          <a:solidFill>
-            <a:srgbClr val="E9EFF7"/>
-          </a:solidFill>
-          <a:ln>
-            <a:noFill/>
-          </a:ln>
-        </p:spPr>
-        <p:style>
-          <a:lnRef idx="1">
-            <a:schemeClr val="accent1"/>
-          </a:lnRef>
-          <a:fillRef idx="3">
-            <a:schemeClr val="accent1"/>
-          </a:fillRef>
-          <a:effectRef idx="2">
-            <a:schemeClr val="accent1"/>
-          </a:effectRef>
-          <a:fontRef idx="minor">
-            <a:schemeClr val="lt1"/>
-          </a:fontRef>
-        </p:style>
-        <p:txBody>
-          <a:bodyPr rtlCol="0" anchor="ctr"/>
-          <a:lstStyle/>
-          <a:p>
-            <a:pPr algn="ctr"/>
+              <a:t>—</a:t>
+            </a:r>
           </a:p>
         </p:txBody>
       </p:sp>
@@ -5551,8 +4648,8 @@
         </p:nvSpPr>
         <p:spPr>
           <a:xfrm>
-            <a:off x="822960" y="1920240"/>
-            <a:ext cx="10698480" cy="640080"/>
+            <a:off x="1371600" y="3108960"/>
+            <a:ext cx="9601200" cy="640080"/>
           </a:xfrm>
           <a:prstGeom prst="rect">
             <a:avLst/>
@@ -5560,20 +4657,20 @@
           <a:noFill/>
         </p:spPr>
         <p:txBody>
-          <a:bodyPr wrap="square">
+          <a:bodyPr wrap="square" lIns="0" rIns="0">
             <a:spAutoFit/>
           </a:bodyPr>
           <a:lstStyle/>
           <a:p>
             <a:pPr algn="l"/>
             <a:r>
-              <a:rPr sz="1300" b="0">
+              <a:rPr sz="1600" b="0">
                 <a:solidFill>
                   <a:srgbClr val="22262E"/>
                 </a:solidFill>
                 <a:latin typeface="游ゴシック"/>
               </a:rPr>
-              <a:t>● 過去のツール展開（成功/失敗）を分析しAI展開指針を策定中</a:t>
+              <a:t>Azure等の有償ツールを一覧化して予算要求</a:t>
             </a:r>
           </a:p>
         </p:txBody>
@@ -5586,8 +4683,8 @@
         </p:nvSpPr>
         <p:spPr>
           <a:xfrm>
-            <a:off x="822960" y="2606040"/>
-            <a:ext cx="10698480" cy="640080"/>
+            <a:off x="914400" y="3886200"/>
+            <a:ext cx="182880" cy="457200"/>
           </a:xfrm>
           <a:prstGeom prst="rect">
             <a:avLst/>
@@ -5595,20 +4692,20 @@
           <a:noFill/>
         </p:spPr>
         <p:txBody>
-          <a:bodyPr wrap="square">
+          <a:bodyPr wrap="square" lIns="0" rIns="0">
             <a:spAutoFit/>
           </a:bodyPr>
           <a:lstStyle/>
           <a:p>
             <a:pPr algn="l"/>
             <a:r>
-              <a:rPr sz="1300" b="0">
-                <a:solidFill>
-                  <a:srgbClr val="22262E"/>
+              <a:rPr sz="1600" b="0">
+                <a:solidFill>
+                  <a:srgbClr val="2E6BC0"/>
                 </a:solidFill>
                 <a:latin typeface="游ゴシック"/>
               </a:rPr>
-              <a:t>● PPS展示会で「工程ばらしを起点としたAI活用」がTPS推進部・大石さんに高評価</a:t>
+              <a:t>—</a:t>
             </a:r>
           </a:p>
         </p:txBody>
@@ -5621,8 +4718,8 @@
         </p:nvSpPr>
         <p:spPr>
           <a:xfrm>
-            <a:off x="822960" y="3291840"/>
-            <a:ext cx="10698480" cy="640080"/>
+            <a:off x="1371600" y="3886200"/>
+            <a:ext cx="9601200" cy="640080"/>
           </a:xfrm>
           <a:prstGeom prst="rect">
             <a:avLst/>
@@ -5630,20 +4727,20 @@
           <a:noFill/>
         </p:spPr>
         <p:txBody>
-          <a:bodyPr wrap="square">
+          <a:bodyPr wrap="square" lIns="0" rIns="0">
             <a:spAutoFit/>
           </a:bodyPr>
           <a:lstStyle/>
           <a:p>
             <a:pPr algn="l"/>
             <a:r>
-              <a:rPr sz="1300" b="0">
+              <a:rPr sz="1600" b="0">
                 <a:solidFill>
                   <a:srgbClr val="22262E"/>
                 </a:solidFill>
                 <a:latin typeface="游ゴシック"/>
               </a:rPr>
-              <a:t>● 「トヨタらしいAI活用」として全社標準化を推進</a:t>
+              <a:t>PTK/EPFマネージャー向け説明会を企画</a:t>
             </a:r>
           </a:p>
         </p:txBody>
@@ -5656,8 +4753,8 @@
         </p:nvSpPr>
         <p:spPr>
           <a:xfrm>
-            <a:off x="822960" y="3977639"/>
-            <a:ext cx="10698480" cy="640080"/>
+            <a:off x="914400" y="4663440"/>
+            <a:ext cx="182880" cy="457200"/>
           </a:xfrm>
           <a:prstGeom prst="rect">
             <a:avLst/>
@@ -5665,20 +4762,20 @@
           <a:noFill/>
         </p:spPr>
         <p:txBody>
-          <a:bodyPr wrap="square">
+          <a:bodyPr wrap="square" lIns="0" rIns="0">
             <a:spAutoFit/>
           </a:bodyPr>
           <a:lstStyle/>
           <a:p>
             <a:pPr algn="l"/>
             <a:r>
-              <a:rPr sz="1300" b="0">
-                <a:solidFill>
-                  <a:srgbClr val="22262E"/>
+              <a:rPr sz="1600" b="0">
+                <a:solidFill>
+                  <a:srgbClr val="2E6BC0"/>
                 </a:solidFill>
                 <a:latin typeface="游ゴシック"/>
               </a:rPr>
-              <a:t>● 戦略会議で車両開発AI事例を経営層報告、「効果明確化」「2ヶ月毎フォロー」を要求</a:t>
+              <a:t>—</a:t>
             </a:r>
           </a:p>
         </p:txBody>
@@ -5691,8 +4788,8 @@
         </p:nvSpPr>
         <p:spPr>
           <a:xfrm>
-            <a:off x="822960" y="4663440"/>
-            <a:ext cx="10698480" cy="640080"/>
+            <a:off x="1371600" y="4663440"/>
+            <a:ext cx="9601200" cy="640080"/>
           </a:xfrm>
           <a:prstGeom prst="rect">
             <a:avLst/>
@@ -5700,20 +4797,90 @@
           <a:noFill/>
         </p:spPr>
         <p:txBody>
-          <a:bodyPr wrap="square">
+          <a:bodyPr wrap="square" lIns="0" rIns="0">
             <a:spAutoFit/>
           </a:bodyPr>
           <a:lstStyle/>
           <a:p>
             <a:pPr algn="l"/>
             <a:r>
-              <a:rPr sz="1300" b="0">
+              <a:rPr sz="1600" b="0">
                 <a:solidFill>
                   <a:srgbClr val="22262E"/>
                 </a:solidFill>
                 <a:latin typeface="游ゴシック"/>
               </a:rPr>
-              <a:t>● 6月AI活用展示会で進捗報告（上原役員出張で日程調整の可能性あり）</a:t>
+              <a:t>マネージャーにはAIリテラシー教育が必要</a:t>
+            </a:r>
+          </a:p>
+        </p:txBody>
+      </p:sp>
+      <p:sp>
+        <p:nvSpPr>
+          <p:cNvPr id="11" name="TextBox 10"/>
+          <p:cNvSpPr txBox="1"/>
+          <p:nvPr/>
+        </p:nvSpPr>
+        <p:spPr>
+          <a:xfrm>
+            <a:off x="914400" y="5440679"/>
+            <a:ext cx="182880" cy="457200"/>
+          </a:xfrm>
+          <a:prstGeom prst="rect">
+            <a:avLst/>
+          </a:prstGeom>
+          <a:noFill/>
+        </p:spPr>
+        <p:txBody>
+          <a:bodyPr wrap="square" lIns="0" rIns="0">
+            <a:spAutoFit/>
+          </a:bodyPr>
+          <a:lstStyle/>
+          <a:p>
+            <a:pPr algn="l"/>
+            <a:r>
+              <a:rPr sz="1600" b="0">
+                <a:solidFill>
+                  <a:srgbClr val="2E6BC0"/>
+                </a:solidFill>
+                <a:latin typeface="游ゴシック"/>
+              </a:rPr>
+              <a:t>—</a:t>
+            </a:r>
+          </a:p>
+        </p:txBody>
+      </p:sp>
+      <p:sp>
+        <p:nvSpPr>
+          <p:cNvPr id="12" name="TextBox 11"/>
+          <p:cNvSpPr txBox="1"/>
+          <p:nvPr/>
+        </p:nvSpPr>
+        <p:spPr>
+          <a:xfrm>
+            <a:off x="1371600" y="5440679"/>
+            <a:ext cx="9601200" cy="640080"/>
+          </a:xfrm>
+          <a:prstGeom prst="rect">
+            <a:avLst/>
+          </a:prstGeom>
+          <a:noFill/>
+        </p:spPr>
+        <p:txBody>
+          <a:bodyPr wrap="square" lIns="0" rIns="0">
+            <a:spAutoFit/>
+          </a:bodyPr>
+          <a:lstStyle/>
+          <a:p>
+            <a:pPr algn="l"/>
+            <a:r>
+              <a:rPr sz="1600" b="0">
+                <a:solidFill>
+                  <a:srgbClr val="22262E"/>
+                </a:solidFill>
+                <a:latin typeface="游ゴシック"/>
+              </a:rPr>
+              <a:t>マネージャー特化の教育資料を作成</a:t>
             </a:r>
           </a:p>
         </p:txBody>
@@ -5738,14 +4905,49 @@
       <p:grpSpPr/>
       <p:sp>
         <p:nvSpPr>
-          <p:cNvPr id="2" name="Rectangle 1"/>
+          <p:cNvPr id="2" name="TextBox 1"/>
+          <p:cNvSpPr txBox="1"/>
+          <p:nvPr/>
+        </p:nvSpPr>
+        <p:spPr>
+          <a:xfrm>
+            <a:off x="914400" y="822960"/>
+            <a:ext cx="10058400" cy="457200"/>
+          </a:xfrm>
+          <a:prstGeom prst="rect">
+            <a:avLst/>
+          </a:prstGeom>
+          <a:noFill/>
+        </p:spPr>
+        <p:txBody>
+          <a:bodyPr wrap="square" lIns="0" rIns="0">
+            <a:spAutoFit/>
+          </a:bodyPr>
+          <a:lstStyle/>
+          <a:p>
+            <a:pPr algn="l"/>
+            <a:r>
+              <a:rPr sz="1100" b="1">
+                <a:solidFill>
+                  <a:srgbClr val="6C757D"/>
+                </a:solidFill>
+                <a:latin typeface="游ゴシック"/>
+              </a:rPr>
+              <a:t>TIMELINE</a:t>
+            </a:r>
+          </a:p>
+        </p:txBody>
+      </p:sp>
+      <p:sp>
+        <p:nvSpPr>
+          <p:cNvPr id="3" name="Rectangle 2"/>
           <p:cNvSpPr/>
           <p:nvPr/>
         </p:nvSpPr>
         <p:spPr>
           <a:xfrm>
-            <a:off x="0" y="0"/>
-            <a:ext cx="12191695" cy="822960"/>
+            <a:off x="914400" y="1325880"/>
+            <a:ext cx="914400" cy="36576"/>
           </a:xfrm>
           <a:prstGeom prst="rect">
             <a:avLst/>
@@ -5781,14 +4983,14 @@
       </p:sp>
       <p:sp>
         <p:nvSpPr>
-          <p:cNvPr id="3" name="TextBox 2"/>
+          <p:cNvPr id="4" name="TextBox 3"/>
           <p:cNvSpPr txBox="1"/>
           <p:nvPr/>
         </p:nvSpPr>
         <p:spPr>
           <a:xfrm>
-            <a:off x="365760" y="182880"/>
-            <a:ext cx="11430000" cy="548640"/>
+            <a:off x="914400" y="1645920"/>
+            <a:ext cx="10332720" cy="731520"/>
           </a:xfrm>
           <a:prstGeom prst="rect">
             <a:avLst/>
@@ -5796,33 +4998,58 @@
           <a:noFill/>
         </p:spPr>
         <p:txBody>
-          <a:bodyPr wrap="none">
+          <a:bodyPr wrap="square" lIns="0" rIns="0">
             <a:spAutoFit/>
           </a:bodyPr>
           <a:lstStyle/>
           <a:p>
-            <a:r>
-              <a:rPr sz="2200" b="1">
-                <a:solidFill>
-                  <a:srgbClr val="FFFFFF"/>
+            <a:pPr algn="l"/>
+            <a:r>
+              <a:rPr sz="2400" b="1">
+                <a:solidFill>
+                  <a:srgbClr val="1F3A68"/>
                 </a:solidFill>
                 <a:latin typeface="游ゴシック"/>
               </a:rPr>
-              <a:t>3. 予算確保・人材育成</a:t>
-            </a:r>
-          </a:p>
-        </p:txBody>
-      </p:sp>
-      <p:sp>
-        <p:nvSpPr>
-          <p:cNvPr id="4" name="TextBox 3"/>
+              <a:t>ロードマップ (4月〜6月)</a:t>
+            </a:r>
+          </a:p>
+        </p:txBody>
+      </p:sp>
+      <p:pic>
+        <p:nvPicPr>
+          <p:cNvPr id="5" name="Picture 4" descr="roadmap.png"/>
+          <p:cNvPicPr>
+            <a:picLocks noChangeAspect="1"/>
+          </p:cNvPicPr>
+          <p:nvPr/>
+        </p:nvPicPr>
+        <p:blipFill>
+          <a:blip r:embed="rId2"/>
+          <a:stretch>
+            <a:fillRect/>
+          </a:stretch>
+        </p:blipFill>
+        <p:spPr>
+          <a:xfrm>
+            <a:off x="914400" y="2743200"/>
+            <a:ext cx="10332720" cy="5116824"/>
+          </a:xfrm>
+          <a:prstGeom prst="rect">
+            <a:avLst/>
+          </a:prstGeom>
+        </p:spPr>
+      </p:pic>
+      <p:sp>
+        <p:nvSpPr>
+          <p:cNvPr id="6" name="TextBox 5"/>
           <p:cNvSpPr txBox="1"/>
           <p:nvPr/>
         </p:nvSpPr>
         <p:spPr>
           <a:xfrm>
-            <a:off x="548640" y="1097280"/>
-            <a:ext cx="11430000" cy="548640"/>
+            <a:off x="914400" y="6217920"/>
+            <a:ext cx="10332720" cy="365760"/>
           </a:xfrm>
           <a:prstGeom prst="rect">
             <a:avLst/>
@@ -5830,273 +5057,20 @@
           <a:noFill/>
         </p:spPr>
         <p:txBody>
-          <a:bodyPr wrap="square">
+          <a:bodyPr wrap="square" lIns="0" rIns="0">
             <a:spAutoFit/>
           </a:bodyPr>
           <a:lstStyle/>
           <a:p>
             <a:pPr algn="l"/>
             <a:r>
-              <a:rPr sz="1500" b="1">
-                <a:solidFill>
-                  <a:srgbClr val="2E6BC0"/>
+              <a:rPr sz="1100" b="0">
+                <a:solidFill>
+                  <a:srgbClr val="6C757D"/>
                 </a:solidFill>
                 <a:latin typeface="游ゴシック"/>
               </a:rPr>
-              <a:t>▼ 福山室長の協力のもと、予算要求・教育展開を準備</a:t>
-            </a:r>
-          </a:p>
-        </p:txBody>
-      </p:sp>
-      <p:sp>
-        <p:nvSpPr>
-          <p:cNvPr id="5" name="Rectangle 4"/>
-          <p:cNvSpPr/>
-          <p:nvPr/>
-        </p:nvSpPr>
-        <p:spPr>
-          <a:xfrm>
-            <a:off x="548640" y="1737360"/>
-            <a:ext cx="11064240" cy="4754880"/>
-          </a:xfrm>
-          <a:prstGeom prst="rect">
-            <a:avLst/>
-          </a:prstGeom>
-          <a:solidFill>
-            <a:srgbClr val="E9EFF7"/>
-          </a:solidFill>
-          <a:ln>
-            <a:noFill/>
-          </a:ln>
-        </p:spPr>
-        <p:style>
-          <a:lnRef idx="1">
-            <a:schemeClr val="accent1"/>
-          </a:lnRef>
-          <a:fillRef idx="3">
-            <a:schemeClr val="accent1"/>
-          </a:fillRef>
-          <a:effectRef idx="2">
-            <a:schemeClr val="accent1"/>
-          </a:effectRef>
-          <a:fontRef idx="minor">
-            <a:schemeClr val="lt1"/>
-          </a:fontRef>
-        </p:style>
-        <p:txBody>
-          <a:bodyPr rtlCol="0" anchor="ctr"/>
-          <a:lstStyle/>
-          <a:p>
-            <a:pPr algn="ctr"/>
-          </a:p>
-        </p:txBody>
-      </p:sp>
-      <p:sp>
-        <p:nvSpPr>
-          <p:cNvPr id="6" name="TextBox 5"/>
-          <p:cNvSpPr txBox="1"/>
-          <p:nvPr/>
-        </p:nvSpPr>
-        <p:spPr>
-          <a:xfrm>
-            <a:off x="822960" y="1920240"/>
-            <a:ext cx="10698480" cy="640080"/>
-          </a:xfrm>
-          <a:prstGeom prst="rect">
-            <a:avLst/>
-          </a:prstGeom>
-          <a:noFill/>
-        </p:spPr>
-        <p:txBody>
-          <a:bodyPr wrap="square">
-            <a:spAutoFit/>
-          </a:bodyPr>
-          <a:lstStyle/>
-          <a:p>
-            <a:pPr algn="l"/>
-            <a:r>
-              <a:rPr sz="1300" b="0">
-                <a:solidFill>
-                  <a:srgbClr val="22262E"/>
-                </a:solidFill>
-                <a:latin typeface="游ゴシック"/>
-              </a:rPr>
-              <a:t>● Azure（RAG利用）等の有償ツール購入計画を共有フォーマットで集約</a:t>
-            </a:r>
-          </a:p>
-        </p:txBody>
-      </p:sp>
-      <p:sp>
-        <p:nvSpPr>
-          <p:cNvPr id="7" name="TextBox 6"/>
-          <p:cNvSpPr txBox="1"/>
-          <p:nvPr/>
-        </p:nvSpPr>
-        <p:spPr>
-          <a:xfrm>
-            <a:off x="822960" y="2606040"/>
-            <a:ext cx="10698480" cy="640080"/>
-          </a:xfrm>
-          <a:prstGeom prst="rect">
-            <a:avLst/>
-          </a:prstGeom>
-          <a:noFill/>
-        </p:spPr>
-        <p:txBody>
-          <a:bodyPr wrap="square">
-            <a:spAutoFit/>
-          </a:bodyPr>
-          <a:lstStyle/>
-          <a:p>
-            <a:pPr algn="l"/>
-            <a:r>
-              <a:rPr sz="1300" b="0">
-                <a:solidFill>
-                  <a:srgbClr val="22262E"/>
-                </a:solidFill>
-                <a:latin typeface="游ゴシック"/>
-              </a:rPr>
-              <a:t>● パワトレGM層向けAI教育を検討、PTK/EPFマネージャー層にも展開</a:t>
-            </a:r>
-          </a:p>
-        </p:txBody>
-      </p:sp>
-      <p:sp>
-        <p:nvSpPr>
-          <p:cNvPr id="8" name="TextBox 7"/>
-          <p:cNvSpPr txBox="1"/>
-          <p:nvPr/>
-        </p:nvSpPr>
-        <p:spPr>
-          <a:xfrm>
-            <a:off x="822960" y="3291840"/>
-            <a:ext cx="10698480" cy="640080"/>
-          </a:xfrm>
-          <a:prstGeom prst="rect">
-            <a:avLst/>
-          </a:prstGeom>
-          <a:noFill/>
-        </p:spPr>
-        <p:txBody>
-          <a:bodyPr wrap="square">
-            <a:spAutoFit/>
-          </a:bodyPr>
-          <a:lstStyle/>
-          <a:p>
-            <a:pPr algn="l"/>
-            <a:r>
-              <a:rPr sz="1300" b="0">
-                <a:solidFill>
-                  <a:srgbClr val="22262E"/>
-                </a:solidFill>
-                <a:latin typeface="游ゴシック"/>
-              </a:rPr>
-              <a:t>● PCY斎藤さんの講座を必須教育化する案</a:t>
-            </a:r>
-          </a:p>
-        </p:txBody>
-      </p:sp>
-      <p:sp>
-        <p:nvSpPr>
-          <p:cNvPr id="9" name="TextBox 8"/>
-          <p:cNvSpPr txBox="1"/>
-          <p:nvPr/>
-        </p:nvSpPr>
-        <p:spPr>
-          <a:xfrm>
-            <a:off x="822960" y="3977639"/>
-            <a:ext cx="10698480" cy="640080"/>
-          </a:xfrm>
-          <a:prstGeom prst="rect">
-            <a:avLst/>
-          </a:prstGeom>
-          <a:noFill/>
-        </p:spPr>
-        <p:txBody>
-          <a:bodyPr wrap="square">
-            <a:spAutoFit/>
-          </a:bodyPr>
-          <a:lstStyle/>
-          <a:p>
-            <a:pPr algn="l"/>
-            <a:r>
-              <a:rPr sz="1300" b="0">
-                <a:solidFill>
-                  <a:srgbClr val="22262E"/>
-                </a:solidFill>
-                <a:latin typeface="游ゴシック"/>
-              </a:rPr>
-              <a:t>● 安田さん主体でPTK/EPFマネージャー向け説明会を企画</a:t>
-            </a:r>
-          </a:p>
-        </p:txBody>
-      </p:sp>
-      <p:sp>
-        <p:nvSpPr>
-          <p:cNvPr id="10" name="TextBox 9"/>
-          <p:cNvSpPr txBox="1"/>
-          <p:nvPr/>
-        </p:nvSpPr>
-        <p:spPr>
-          <a:xfrm>
-            <a:off x="822960" y="4663440"/>
-            <a:ext cx="10698480" cy="640080"/>
-          </a:xfrm>
-          <a:prstGeom prst="rect">
-            <a:avLst/>
-          </a:prstGeom>
-          <a:noFill/>
-        </p:spPr>
-        <p:txBody>
-          <a:bodyPr wrap="square">
-            <a:spAutoFit/>
-          </a:bodyPr>
-          <a:lstStyle/>
-          <a:p>
-            <a:pPr algn="l"/>
-            <a:r>
-              <a:rPr sz="1300" b="0">
-                <a:solidFill>
-                  <a:srgbClr val="22262E"/>
-                </a:solidFill>
-                <a:latin typeface="游ゴシック"/>
-              </a:rPr>
-              <a:t>● 【質疑】管理職には可能/不可の見極め等AIリテラシーが必要（上野）</a:t>
-            </a:r>
-          </a:p>
-        </p:txBody>
-      </p:sp>
-      <p:sp>
-        <p:nvSpPr>
-          <p:cNvPr id="11" name="TextBox 10"/>
-          <p:cNvSpPr txBox="1"/>
-          <p:nvPr/>
-        </p:nvSpPr>
-        <p:spPr>
-          <a:xfrm>
-            <a:off x="822960" y="5349240"/>
-            <a:ext cx="10698480" cy="640080"/>
-          </a:xfrm>
-          <a:prstGeom prst="rect">
-            <a:avLst/>
-          </a:prstGeom>
-          <a:noFill/>
-        </p:spPr>
-        <p:txBody>
-          <a:bodyPr wrap="square">
-            <a:spAutoFit/>
-          </a:bodyPr>
-          <a:lstStyle/>
-          <a:p>
-            <a:pPr algn="l"/>
-            <a:r>
-              <a:rPr sz="1300" b="0">
-                <a:solidFill>
-                  <a:srgbClr val="22262E"/>
-                </a:solidFill>
-                <a:latin typeface="游ゴシック"/>
-              </a:rPr>
-              <a:t>● 【回答】マネージャー特化教材を作成（安田）</a:t>
+              <a:t>6/15 経営層報告が全体のマイルストーン。</a:t>
             </a:r>
           </a:p>
         </p:txBody>
@@ -6121,14 +5095,49 @@
       <p:grpSpPr/>
       <p:sp>
         <p:nvSpPr>
-          <p:cNvPr id="2" name="Rectangle 1"/>
+          <p:cNvPr id="2" name="TextBox 1"/>
+          <p:cNvSpPr txBox="1"/>
+          <p:nvPr/>
+        </p:nvSpPr>
+        <p:spPr>
+          <a:xfrm>
+            <a:off x="914400" y="822960"/>
+            <a:ext cx="10058400" cy="457200"/>
+          </a:xfrm>
+          <a:prstGeom prst="rect">
+            <a:avLst/>
+          </a:prstGeom>
+          <a:noFill/>
+        </p:spPr>
+        <p:txBody>
+          <a:bodyPr wrap="square" lIns="0" rIns="0">
+            <a:spAutoFit/>
+          </a:bodyPr>
+          <a:lstStyle/>
+          <a:p>
+            <a:pPr algn="l"/>
+            <a:r>
+              <a:rPr sz="1100" b="1">
+                <a:solidFill>
+                  <a:srgbClr val="6C757D"/>
+                </a:solidFill>
+                <a:latin typeface="游ゴシック"/>
+              </a:rPr>
+              <a:t>DECISIONS</a:t>
+            </a:r>
+          </a:p>
+        </p:txBody>
+      </p:sp>
+      <p:sp>
+        <p:nvSpPr>
+          <p:cNvPr id="3" name="Rectangle 2"/>
           <p:cNvSpPr/>
           <p:nvPr/>
         </p:nvSpPr>
         <p:spPr>
           <a:xfrm>
-            <a:off x="0" y="0"/>
-            <a:ext cx="12191695" cy="822960"/>
+            <a:off x="914400" y="1325880"/>
+            <a:ext cx="914400" cy="36576"/>
           </a:xfrm>
           <a:prstGeom prst="rect">
             <a:avLst/>
@@ -6164,14 +5173,14 @@
       </p:sp>
       <p:sp>
         <p:nvSpPr>
-          <p:cNvPr id="3" name="TextBox 2"/>
+          <p:cNvPr id="4" name="TextBox 3"/>
           <p:cNvSpPr txBox="1"/>
           <p:nvPr/>
         </p:nvSpPr>
         <p:spPr>
           <a:xfrm>
-            <a:off x="365760" y="182880"/>
-            <a:ext cx="11430000" cy="548640"/>
+            <a:off x="914400" y="1645920"/>
+            <a:ext cx="10058400" cy="731520"/>
           </a:xfrm>
           <a:prstGeom prst="rect">
             <a:avLst/>
@@ -6179,47 +5188,24 @@
           <a:noFill/>
         </p:spPr>
         <p:txBody>
-          <a:bodyPr wrap="none">
+          <a:bodyPr wrap="square" lIns="0" rIns="0">
             <a:spAutoFit/>
           </a:bodyPr>
           <a:lstStyle/>
           <a:p>
-            <a:r>
-              <a:rPr sz="2200" b="1">
-                <a:solidFill>
-                  <a:srgbClr val="FFFFFF"/>
+            <a:pPr algn="l"/>
+            <a:r>
+              <a:rPr sz="2800" b="1">
+                <a:solidFill>
+                  <a:srgbClr val="1F3A68"/>
                 </a:solidFill>
                 <a:latin typeface="游ゴシック"/>
               </a:rPr>
-              <a:t>ロードマップ ─ 4月〜6月の実行計画</a:t>
-            </a:r>
-          </a:p>
-        </p:txBody>
-      </p:sp>
-      <p:pic>
-        <p:nvPicPr>
-          <p:cNvPr id="4" name="Picture 3" descr="roadmap.png"/>
-          <p:cNvPicPr>
-            <a:picLocks noChangeAspect="1"/>
-          </p:cNvPicPr>
-          <p:nvPr/>
-        </p:nvPicPr>
-        <p:blipFill>
-          <a:blip r:embed="rId2"/>
-          <a:stretch>
-            <a:fillRect/>
-          </a:stretch>
-        </p:blipFill>
-        <p:spPr>
-          <a:xfrm>
-            <a:off x="731520" y="1097280"/>
-            <a:ext cx="10698480" cy="5327953"/>
-          </a:xfrm>
-          <a:prstGeom prst="rect">
-            <a:avLst/>
-          </a:prstGeom>
-        </p:spPr>
-      </p:pic>
+              <a:t>本日の決定</a:t>
+            </a:r>
+          </a:p>
+        </p:txBody>
+      </p:sp>
       <p:sp>
         <p:nvSpPr>
           <p:cNvPr id="5" name="TextBox 4"/>
@@ -6228,8 +5214,8 @@
         </p:nvSpPr>
         <p:spPr>
           <a:xfrm>
-            <a:off x="731520" y="6217920"/>
-            <a:ext cx="10698480" cy="457200"/>
+            <a:off x="914400" y="2743200"/>
+            <a:ext cx="731520" cy="457200"/>
           </a:xfrm>
           <a:prstGeom prst="rect">
             <a:avLst/>
@@ -6237,20 +5223,405 @@
           <a:noFill/>
         </p:spPr>
         <p:txBody>
-          <a:bodyPr wrap="square">
+          <a:bodyPr wrap="square" lIns="0" rIns="0">
             <a:spAutoFit/>
           </a:bodyPr>
           <a:lstStyle/>
           <a:p>
             <a:pPr algn="l"/>
             <a:r>
-              <a:rPr sz="1200" b="1">
-                <a:solidFill>
-                  <a:srgbClr val="1F3A68"/>
+              <a:rPr sz="1600" b="1">
+                <a:solidFill>
+                  <a:srgbClr val="2E6BC0"/>
                 </a:solidFill>
                 <a:latin typeface="游ゴシック"/>
               </a:rPr>
-              <a:t>▼ 6月15日の経営層報告が全活動のマイルストーン。2ヶ月毎フォロー要求に整合。</a:t>
+              <a:t>01</a:t>
+            </a:r>
+          </a:p>
+        </p:txBody>
+      </p:sp>
+      <p:sp>
+        <p:nvSpPr>
+          <p:cNvPr id="6" name="TextBox 5"/>
+          <p:cNvSpPr txBox="1"/>
+          <p:nvPr/>
+        </p:nvSpPr>
+        <p:spPr>
+          <a:xfrm>
+            <a:off x="1828800" y="2743200"/>
+            <a:ext cx="9601200" cy="548640"/>
+          </a:xfrm>
+          <a:prstGeom prst="rect">
+            <a:avLst/>
+          </a:prstGeom>
+          <a:noFill/>
+        </p:spPr>
+        <p:txBody>
+          <a:bodyPr wrap="square" lIns="0" rIns="0">
+            <a:spAutoFit/>
+          </a:bodyPr>
+          <a:lstStyle/>
+          <a:p>
+            <a:pPr algn="l"/>
+            <a:r>
+              <a:rPr sz="1300" b="0">
+                <a:solidFill>
+                  <a:srgbClr val="22262E"/>
+                </a:solidFill>
+                <a:latin typeface="游ゴシック"/>
+              </a:rPr>
+              <a:t>品質WGは「Teams会議情報の活用」で始動</a:t>
+            </a:r>
+          </a:p>
+        </p:txBody>
+      </p:sp>
+      <p:sp>
+        <p:nvSpPr>
+          <p:cNvPr id="7" name="TextBox 6"/>
+          <p:cNvSpPr txBox="1"/>
+          <p:nvPr/>
+        </p:nvSpPr>
+        <p:spPr>
+          <a:xfrm>
+            <a:off x="914400" y="3337560"/>
+            <a:ext cx="731520" cy="457200"/>
+          </a:xfrm>
+          <a:prstGeom prst="rect">
+            <a:avLst/>
+          </a:prstGeom>
+          <a:noFill/>
+        </p:spPr>
+        <p:txBody>
+          <a:bodyPr wrap="square" lIns="0" rIns="0">
+            <a:spAutoFit/>
+          </a:bodyPr>
+          <a:lstStyle/>
+          <a:p>
+            <a:pPr algn="l"/>
+            <a:r>
+              <a:rPr sz="1600" b="1">
+                <a:solidFill>
+                  <a:srgbClr val="2E6BC0"/>
+                </a:solidFill>
+                <a:latin typeface="游ゴシック"/>
+              </a:rPr>
+              <a:t>02</a:t>
+            </a:r>
+          </a:p>
+        </p:txBody>
+      </p:sp>
+      <p:sp>
+        <p:nvSpPr>
+          <p:cNvPr id="8" name="TextBox 7"/>
+          <p:cNvSpPr txBox="1"/>
+          <p:nvPr/>
+        </p:nvSpPr>
+        <p:spPr>
+          <a:xfrm>
+            <a:off x="1828800" y="3337560"/>
+            <a:ext cx="9601200" cy="548640"/>
+          </a:xfrm>
+          <a:prstGeom prst="rect">
+            <a:avLst/>
+          </a:prstGeom>
+          <a:noFill/>
+        </p:spPr>
+        <p:txBody>
+          <a:bodyPr wrap="square" lIns="0" rIns="0">
+            <a:spAutoFit/>
+          </a:bodyPr>
+          <a:lstStyle/>
+          <a:p>
+            <a:pPr algn="l"/>
+            <a:r>
+              <a:rPr sz="1300" b="0">
+                <a:solidFill>
+                  <a:srgbClr val="22262E"/>
+                </a:solidFill>
+                <a:latin typeface="游ゴシック"/>
+              </a:rPr>
+              <a:t>展開・広報WGはAI展開指針を策定</a:t>
+            </a:r>
+          </a:p>
+        </p:txBody>
+      </p:sp>
+      <p:sp>
+        <p:nvSpPr>
+          <p:cNvPr id="9" name="TextBox 8"/>
+          <p:cNvSpPr txBox="1"/>
+          <p:nvPr/>
+        </p:nvSpPr>
+        <p:spPr>
+          <a:xfrm>
+            <a:off x="914400" y="3931920"/>
+            <a:ext cx="731520" cy="457200"/>
+          </a:xfrm>
+          <a:prstGeom prst="rect">
+            <a:avLst/>
+          </a:prstGeom>
+          <a:noFill/>
+        </p:spPr>
+        <p:txBody>
+          <a:bodyPr wrap="square" lIns="0" rIns="0">
+            <a:spAutoFit/>
+          </a:bodyPr>
+          <a:lstStyle/>
+          <a:p>
+            <a:pPr algn="l"/>
+            <a:r>
+              <a:rPr sz="1600" b="1">
+                <a:solidFill>
+                  <a:srgbClr val="2E6BC0"/>
+                </a:solidFill>
+                <a:latin typeface="游ゴシック"/>
+              </a:rPr>
+              <a:t>03</a:t>
+            </a:r>
+          </a:p>
+        </p:txBody>
+      </p:sp>
+      <p:sp>
+        <p:nvSpPr>
+          <p:cNvPr id="10" name="TextBox 9"/>
+          <p:cNvSpPr txBox="1"/>
+          <p:nvPr/>
+        </p:nvSpPr>
+        <p:spPr>
+          <a:xfrm>
+            <a:off x="1828800" y="3931920"/>
+            <a:ext cx="9601200" cy="548640"/>
+          </a:xfrm>
+          <a:prstGeom prst="rect">
+            <a:avLst/>
+          </a:prstGeom>
+          <a:noFill/>
+        </p:spPr>
+        <p:txBody>
+          <a:bodyPr wrap="square" lIns="0" rIns="0">
+            <a:spAutoFit/>
+          </a:bodyPr>
+          <a:lstStyle/>
+          <a:p>
+            <a:pPr algn="l"/>
+            <a:r>
+              <a:rPr sz="1300" b="0">
+                <a:solidFill>
+                  <a:srgbClr val="22262E"/>
+                </a:solidFill>
+                <a:latin typeface="游ゴシック"/>
+              </a:rPr>
+              <a:t>TPS推進部と全社標準化を連携</a:t>
+            </a:r>
+          </a:p>
+        </p:txBody>
+      </p:sp>
+      <p:sp>
+        <p:nvSpPr>
+          <p:cNvPr id="11" name="TextBox 10"/>
+          <p:cNvSpPr txBox="1"/>
+          <p:nvPr/>
+        </p:nvSpPr>
+        <p:spPr>
+          <a:xfrm>
+            <a:off x="914400" y="4526280"/>
+            <a:ext cx="731520" cy="457200"/>
+          </a:xfrm>
+          <a:prstGeom prst="rect">
+            <a:avLst/>
+          </a:prstGeom>
+          <a:noFill/>
+        </p:spPr>
+        <p:txBody>
+          <a:bodyPr wrap="square" lIns="0" rIns="0">
+            <a:spAutoFit/>
+          </a:bodyPr>
+          <a:lstStyle/>
+          <a:p>
+            <a:pPr algn="l"/>
+            <a:r>
+              <a:rPr sz="1600" b="1">
+                <a:solidFill>
+                  <a:srgbClr val="2E6BC0"/>
+                </a:solidFill>
+                <a:latin typeface="游ゴシック"/>
+              </a:rPr>
+              <a:t>04</a:t>
+            </a:r>
+          </a:p>
+        </p:txBody>
+      </p:sp>
+      <p:sp>
+        <p:nvSpPr>
+          <p:cNvPr id="12" name="TextBox 11"/>
+          <p:cNvSpPr txBox="1"/>
+          <p:nvPr/>
+        </p:nvSpPr>
+        <p:spPr>
+          <a:xfrm>
+            <a:off x="1828800" y="4526280"/>
+            <a:ext cx="9601200" cy="548640"/>
+          </a:xfrm>
+          <a:prstGeom prst="rect">
+            <a:avLst/>
+          </a:prstGeom>
+          <a:noFill/>
+        </p:spPr>
+        <p:txBody>
+          <a:bodyPr wrap="square" lIns="0" rIns="0">
+            <a:spAutoFit/>
+          </a:bodyPr>
+          <a:lstStyle/>
+          <a:p>
+            <a:pPr algn="l"/>
+            <a:r>
+              <a:rPr sz="1300" b="0">
+                <a:solidFill>
+                  <a:srgbClr val="22262E"/>
+                </a:solidFill>
+                <a:latin typeface="游ゴシック"/>
+              </a:rPr>
+              <a:t>6月AI活用展示会で経営層へ進捗報告</a:t>
+            </a:r>
+          </a:p>
+        </p:txBody>
+      </p:sp>
+      <p:sp>
+        <p:nvSpPr>
+          <p:cNvPr id="13" name="TextBox 12"/>
+          <p:cNvSpPr txBox="1"/>
+          <p:nvPr/>
+        </p:nvSpPr>
+        <p:spPr>
+          <a:xfrm>
+            <a:off x="914400" y="5120640"/>
+            <a:ext cx="731520" cy="457200"/>
+          </a:xfrm>
+          <a:prstGeom prst="rect">
+            <a:avLst/>
+          </a:prstGeom>
+          <a:noFill/>
+        </p:spPr>
+        <p:txBody>
+          <a:bodyPr wrap="square" lIns="0" rIns="0">
+            <a:spAutoFit/>
+          </a:bodyPr>
+          <a:lstStyle/>
+          <a:p>
+            <a:pPr algn="l"/>
+            <a:r>
+              <a:rPr sz="1600" b="1">
+                <a:solidFill>
+                  <a:srgbClr val="2E6BC0"/>
+                </a:solidFill>
+                <a:latin typeface="游ゴシック"/>
+              </a:rPr>
+              <a:t>05</a:t>
+            </a:r>
+          </a:p>
+        </p:txBody>
+      </p:sp>
+      <p:sp>
+        <p:nvSpPr>
+          <p:cNvPr id="14" name="TextBox 13"/>
+          <p:cNvSpPr txBox="1"/>
+          <p:nvPr/>
+        </p:nvSpPr>
+        <p:spPr>
+          <a:xfrm>
+            <a:off x="1828800" y="5120640"/>
+            <a:ext cx="9601200" cy="548640"/>
+          </a:xfrm>
+          <a:prstGeom prst="rect">
+            <a:avLst/>
+          </a:prstGeom>
+          <a:noFill/>
+        </p:spPr>
+        <p:txBody>
+          <a:bodyPr wrap="square" lIns="0" rIns="0">
+            <a:spAutoFit/>
+          </a:bodyPr>
+          <a:lstStyle/>
+          <a:p>
+            <a:pPr algn="l"/>
+            <a:r>
+              <a:rPr sz="1300" b="0">
+                <a:solidFill>
+                  <a:srgbClr val="22262E"/>
+                </a:solidFill>
+                <a:latin typeface="游ゴシック"/>
+              </a:rPr>
+              <a:t>有償ツールをリスト化し予算要求</a:t>
+            </a:r>
+          </a:p>
+        </p:txBody>
+      </p:sp>
+      <p:sp>
+        <p:nvSpPr>
+          <p:cNvPr id="15" name="TextBox 14"/>
+          <p:cNvSpPr txBox="1"/>
+          <p:nvPr/>
+        </p:nvSpPr>
+        <p:spPr>
+          <a:xfrm>
+            <a:off x="914400" y="5715000"/>
+            <a:ext cx="731520" cy="457200"/>
+          </a:xfrm>
+          <a:prstGeom prst="rect">
+            <a:avLst/>
+          </a:prstGeom>
+          <a:noFill/>
+        </p:spPr>
+        <p:txBody>
+          <a:bodyPr wrap="square" lIns="0" rIns="0">
+            <a:spAutoFit/>
+          </a:bodyPr>
+          <a:lstStyle/>
+          <a:p>
+            <a:pPr algn="l"/>
+            <a:r>
+              <a:rPr sz="1600" b="1">
+                <a:solidFill>
+                  <a:srgbClr val="2E6BC0"/>
+                </a:solidFill>
+                <a:latin typeface="游ゴシック"/>
+              </a:rPr>
+              <a:t>06</a:t>
+            </a:r>
+          </a:p>
+        </p:txBody>
+      </p:sp>
+      <p:sp>
+        <p:nvSpPr>
+          <p:cNvPr id="16" name="TextBox 15"/>
+          <p:cNvSpPr txBox="1"/>
+          <p:nvPr/>
+        </p:nvSpPr>
+        <p:spPr>
+          <a:xfrm>
+            <a:off x="1828800" y="5715000"/>
+            <a:ext cx="9601200" cy="548640"/>
+          </a:xfrm>
+          <a:prstGeom prst="rect">
+            <a:avLst/>
+          </a:prstGeom>
+          <a:noFill/>
+        </p:spPr>
+        <p:txBody>
+          <a:bodyPr wrap="square" lIns="0" rIns="0">
+            <a:spAutoFit/>
+          </a:bodyPr>
+          <a:lstStyle/>
+          <a:p>
+            <a:pPr algn="l"/>
+            <a:r>
+              <a:rPr sz="1300" b="0">
+                <a:solidFill>
+                  <a:srgbClr val="22262E"/>
+                </a:solidFill>
+                <a:latin typeface="游ゴシック"/>
+              </a:rPr>
+              <a:t>PTK・EPFマネージャー向け説明会を実施</a:t>
             </a:r>
           </a:p>
         </p:txBody>
@@ -6275,14 +5646,49 @@
       <p:grpSpPr/>
       <p:sp>
         <p:nvSpPr>
-          <p:cNvPr id="2" name="Rectangle 1"/>
+          <p:cNvPr id="2" name="TextBox 1"/>
+          <p:cNvSpPr txBox="1"/>
+          <p:nvPr/>
+        </p:nvSpPr>
+        <p:spPr>
+          <a:xfrm>
+            <a:off x="914400" y="822960"/>
+            <a:ext cx="10058400" cy="457200"/>
+          </a:xfrm>
+          <a:prstGeom prst="rect">
+            <a:avLst/>
+          </a:prstGeom>
+          <a:noFill/>
+        </p:spPr>
+        <p:txBody>
+          <a:bodyPr wrap="square" lIns="0" rIns="0">
+            <a:spAutoFit/>
+          </a:bodyPr>
+          <a:lstStyle/>
+          <a:p>
+            <a:pPr algn="l"/>
+            <a:r>
+              <a:rPr sz="1100" b="1">
+                <a:solidFill>
+                  <a:srgbClr val="6C757D"/>
+                </a:solidFill>
+                <a:latin typeface="游ゴシック"/>
+              </a:rPr>
+              <a:t>NEXT ACTIONS</a:t>
+            </a:r>
+          </a:p>
+        </p:txBody>
+      </p:sp>
+      <p:sp>
+        <p:nvSpPr>
+          <p:cNvPr id="3" name="Rectangle 2"/>
           <p:cNvSpPr/>
           <p:nvPr/>
         </p:nvSpPr>
         <p:spPr>
           <a:xfrm>
-            <a:off x="0" y="0"/>
-            <a:ext cx="12191695" cy="822960"/>
+            <a:off x="914400" y="1325880"/>
+            <a:ext cx="914400" cy="36576"/>
           </a:xfrm>
           <a:prstGeom prst="rect">
             <a:avLst/>
@@ -6318,14 +5724,14 @@
       </p:sp>
       <p:sp>
         <p:nvSpPr>
-          <p:cNvPr id="3" name="TextBox 2"/>
+          <p:cNvPr id="4" name="TextBox 3"/>
           <p:cNvSpPr txBox="1"/>
           <p:nvPr/>
         </p:nvSpPr>
         <p:spPr>
           <a:xfrm>
-            <a:off x="365760" y="182880"/>
-            <a:ext cx="11430000" cy="548640"/>
+            <a:off x="914400" y="1645920"/>
+            <a:ext cx="10058400" cy="731520"/>
           </a:xfrm>
           <a:prstGeom prst="rect">
             <a:avLst/>
@@ -6333,713 +5739,595 @@
           <a:noFill/>
         </p:spPr>
         <p:txBody>
-          <a:bodyPr wrap="none">
+          <a:bodyPr wrap="square" lIns="0" rIns="0">
             <a:spAutoFit/>
           </a:bodyPr>
           <a:lstStyle/>
           <a:p>
-            <a:r>
-              <a:rPr sz="2200" b="1">
-                <a:solidFill>
-                  <a:srgbClr val="FFFFFF"/>
+            <a:pPr algn="l"/>
+            <a:r>
+              <a:rPr sz="2800" b="1">
+                <a:solidFill>
+                  <a:srgbClr val="1F3A68"/>
                 </a:solidFill>
                 <a:latin typeface="游ゴシック"/>
               </a:rPr>
-              <a:t>決定事項</a:t>
-            </a:r>
-          </a:p>
-        </p:txBody>
-      </p:sp>
-      <p:sp>
-        <p:nvSpPr>
-          <p:cNvPr id="4" name="Rectangle 3"/>
-          <p:cNvSpPr/>
-          <p:nvPr/>
-        </p:nvSpPr>
-        <p:spPr>
-          <a:xfrm>
-            <a:off x="548640" y="1143000"/>
-            <a:ext cx="11064240" cy="713232"/>
-          </a:xfrm>
-          <a:prstGeom prst="rect">
-            <a:avLst/>
-          </a:prstGeom>
-          <a:solidFill>
-            <a:srgbClr val="E9EFF7"/>
-          </a:solidFill>
-          <a:ln>
-            <a:solidFill>
-              <a:srgbClr val="2E6BC0"/>
-            </a:solidFill>
-          </a:ln>
-        </p:spPr>
-        <p:style>
-          <a:lnRef idx="1">
-            <a:schemeClr val="accent1"/>
-          </a:lnRef>
-          <a:fillRef idx="3">
-            <a:schemeClr val="accent1"/>
-          </a:fillRef>
-          <a:effectRef idx="2">
-            <a:schemeClr val="accent1"/>
-          </a:effectRef>
-          <a:fontRef idx="minor">
-            <a:schemeClr val="lt1"/>
-          </a:fontRef>
-        </p:style>
-        <p:txBody>
-          <a:bodyPr rtlCol="0" anchor="ctr"/>
-          <a:lstStyle/>
-          <a:p>
-            <a:pPr algn="ctr"/>
-          </a:p>
-        </p:txBody>
-      </p:sp>
-      <p:sp>
-        <p:nvSpPr>
-          <p:cNvPr id="5" name="TextBox 4"/>
-          <p:cNvSpPr txBox="1"/>
-          <p:nvPr/>
-        </p:nvSpPr>
-        <p:spPr>
-          <a:xfrm>
-            <a:off x="731520" y="1280160"/>
-            <a:ext cx="914400" cy="457200"/>
-          </a:xfrm>
-          <a:prstGeom prst="rect">
-            <a:avLst/>
-          </a:prstGeom>
-          <a:noFill/>
-        </p:spPr>
-        <p:txBody>
-          <a:bodyPr wrap="square">
-            <a:spAutoFit/>
-          </a:bodyPr>
-          <a:lstStyle/>
-          <a:p>
-            <a:pPr algn="l"/>
-            <a:r>
-              <a:rPr sz="1800" b="1">
-                <a:solidFill>
-                  <a:srgbClr val="2E6BC0"/>
-                </a:solidFill>
-                <a:latin typeface="游ゴシック"/>
-              </a:rPr>
-              <a:t>D1</a:t>
-            </a:r>
-          </a:p>
-        </p:txBody>
-      </p:sp>
-      <p:sp>
-        <p:nvSpPr>
-          <p:cNvPr id="6" name="TextBox 5"/>
-          <p:cNvSpPr txBox="1"/>
-          <p:nvPr/>
-        </p:nvSpPr>
-        <p:spPr>
-          <a:xfrm>
-            <a:off x="1737360" y="1325880"/>
-            <a:ext cx="9875520" cy="457200"/>
-          </a:xfrm>
-          <a:prstGeom prst="rect">
-            <a:avLst/>
-          </a:prstGeom>
-          <a:noFill/>
-        </p:spPr>
-        <p:txBody>
-          <a:bodyPr wrap="square">
-            <a:spAutoFit/>
-          </a:bodyPr>
-          <a:lstStyle/>
-          <a:p>
-            <a:pPr algn="l"/>
-            <a:r>
-              <a:rPr sz="1300" b="0">
-                <a:solidFill>
-                  <a:srgbClr val="22262E"/>
-                </a:solidFill>
-                <a:latin typeface="游ゴシック"/>
-              </a:rPr>
-              <a:t>品質ワーキングは「Teams会議情報の活用」をテーマに活動を開始</a:t>
-            </a:r>
-          </a:p>
-        </p:txBody>
-      </p:sp>
-      <p:sp>
-        <p:nvSpPr>
-          <p:cNvPr id="7" name="Rectangle 6"/>
-          <p:cNvSpPr/>
-          <p:nvPr/>
-        </p:nvSpPr>
-        <p:spPr>
-          <a:xfrm>
-            <a:off x="548640" y="1947672"/>
-            <a:ext cx="11064240" cy="713232"/>
-          </a:xfrm>
-          <a:prstGeom prst="rect">
-            <a:avLst/>
-          </a:prstGeom>
-          <a:solidFill>
-            <a:srgbClr val="FFFFFF"/>
-          </a:solidFill>
-          <a:ln>
-            <a:solidFill>
-              <a:srgbClr val="2E6BC0"/>
-            </a:solidFill>
-          </a:ln>
-        </p:spPr>
-        <p:style>
-          <a:lnRef idx="1">
-            <a:schemeClr val="accent1"/>
-          </a:lnRef>
-          <a:fillRef idx="3">
-            <a:schemeClr val="accent1"/>
-          </a:fillRef>
-          <a:effectRef idx="2">
-            <a:schemeClr val="accent1"/>
-          </a:effectRef>
-          <a:fontRef idx="minor">
-            <a:schemeClr val="lt1"/>
-          </a:fontRef>
-        </p:style>
-        <p:txBody>
-          <a:bodyPr rtlCol="0" anchor="ctr"/>
-          <a:lstStyle/>
-          <a:p>
-            <a:pPr algn="ctr"/>
-          </a:p>
-        </p:txBody>
-      </p:sp>
-      <p:sp>
-        <p:nvSpPr>
-          <p:cNvPr id="8" name="TextBox 7"/>
-          <p:cNvSpPr txBox="1"/>
-          <p:nvPr/>
-        </p:nvSpPr>
-        <p:spPr>
-          <a:xfrm>
-            <a:off x="731520" y="2084831"/>
-            <a:ext cx="914400" cy="457200"/>
-          </a:xfrm>
-          <a:prstGeom prst="rect">
-            <a:avLst/>
-          </a:prstGeom>
-          <a:noFill/>
-        </p:spPr>
-        <p:txBody>
-          <a:bodyPr wrap="square">
-            <a:spAutoFit/>
-          </a:bodyPr>
-          <a:lstStyle/>
-          <a:p>
-            <a:pPr algn="l"/>
-            <a:r>
-              <a:rPr sz="1800" b="1">
-                <a:solidFill>
-                  <a:srgbClr val="2E6BC0"/>
-                </a:solidFill>
-                <a:latin typeface="游ゴシック"/>
-              </a:rPr>
-              <a:t>D2</a:t>
-            </a:r>
-          </a:p>
-        </p:txBody>
-      </p:sp>
-      <p:sp>
-        <p:nvSpPr>
-          <p:cNvPr id="9" name="TextBox 8"/>
-          <p:cNvSpPr txBox="1"/>
-          <p:nvPr/>
-        </p:nvSpPr>
-        <p:spPr>
-          <a:xfrm>
-            <a:off x="1737360" y="2130552"/>
-            <a:ext cx="9875520" cy="457200"/>
-          </a:xfrm>
-          <a:prstGeom prst="rect">
-            <a:avLst/>
-          </a:prstGeom>
-          <a:noFill/>
-        </p:spPr>
-        <p:txBody>
-          <a:bodyPr wrap="square">
-            <a:spAutoFit/>
-          </a:bodyPr>
-          <a:lstStyle/>
-          <a:p>
-            <a:pPr algn="l"/>
-            <a:r>
-              <a:rPr sz="1300" b="0">
-                <a:solidFill>
-                  <a:srgbClr val="22262E"/>
-                </a:solidFill>
-                <a:latin typeface="游ゴシック"/>
-              </a:rPr>
-              <a:t>展開・広報ワーキングはAI展開の活動指針を策定</a:t>
-            </a:r>
-          </a:p>
-        </p:txBody>
-      </p:sp>
-      <p:sp>
-        <p:nvSpPr>
-          <p:cNvPr id="10" name="Rectangle 9"/>
-          <p:cNvSpPr/>
-          <p:nvPr/>
-        </p:nvSpPr>
-        <p:spPr>
-          <a:xfrm>
-            <a:off x="548640" y="2752344"/>
-            <a:ext cx="11064240" cy="713232"/>
-          </a:xfrm>
-          <a:prstGeom prst="rect">
-            <a:avLst/>
-          </a:prstGeom>
-          <a:solidFill>
-            <a:srgbClr val="E9EFF7"/>
-          </a:solidFill>
-          <a:ln>
-            <a:solidFill>
-              <a:srgbClr val="2E6BC0"/>
-            </a:solidFill>
-          </a:ln>
-        </p:spPr>
-        <p:style>
-          <a:lnRef idx="1">
-            <a:schemeClr val="accent1"/>
-          </a:lnRef>
-          <a:fillRef idx="3">
-            <a:schemeClr val="accent1"/>
-          </a:fillRef>
-          <a:effectRef idx="2">
-            <a:schemeClr val="accent1"/>
-          </a:effectRef>
-          <a:fontRef idx="minor">
-            <a:schemeClr val="lt1"/>
-          </a:fontRef>
-        </p:style>
-        <p:txBody>
-          <a:bodyPr rtlCol="0" anchor="ctr"/>
-          <a:lstStyle/>
-          <a:p>
-            <a:pPr algn="ctr"/>
-          </a:p>
-        </p:txBody>
-      </p:sp>
-      <p:sp>
-        <p:nvSpPr>
-          <p:cNvPr id="11" name="TextBox 10"/>
-          <p:cNvSpPr txBox="1"/>
-          <p:nvPr/>
-        </p:nvSpPr>
-        <p:spPr>
-          <a:xfrm>
-            <a:off x="731520" y="2889504"/>
-            <a:ext cx="914400" cy="457200"/>
-          </a:xfrm>
-          <a:prstGeom prst="rect">
-            <a:avLst/>
-          </a:prstGeom>
-          <a:noFill/>
-        </p:spPr>
-        <p:txBody>
-          <a:bodyPr wrap="square">
-            <a:spAutoFit/>
-          </a:bodyPr>
-          <a:lstStyle/>
-          <a:p>
-            <a:pPr algn="l"/>
-            <a:r>
-              <a:rPr sz="1800" b="1">
-                <a:solidFill>
-                  <a:srgbClr val="2E6BC0"/>
-                </a:solidFill>
-                <a:latin typeface="游ゴシック"/>
-              </a:rPr>
-              <a:t>D3</a:t>
-            </a:r>
-          </a:p>
-        </p:txBody>
-      </p:sp>
-      <p:sp>
-        <p:nvSpPr>
-          <p:cNvPr id="12" name="TextBox 11"/>
-          <p:cNvSpPr txBox="1"/>
-          <p:nvPr/>
-        </p:nvSpPr>
-        <p:spPr>
-          <a:xfrm>
-            <a:off x="1737360" y="2935224"/>
-            <a:ext cx="9875520" cy="457200"/>
-          </a:xfrm>
-          <a:prstGeom prst="rect">
-            <a:avLst/>
-          </a:prstGeom>
-          <a:noFill/>
-        </p:spPr>
-        <p:txBody>
-          <a:bodyPr wrap="square">
-            <a:spAutoFit/>
-          </a:bodyPr>
-          <a:lstStyle/>
-          <a:p>
-            <a:pPr algn="l"/>
-            <a:r>
-              <a:rPr sz="1300" b="0">
-                <a:solidFill>
-                  <a:srgbClr val="22262E"/>
-                </a:solidFill>
-                <a:latin typeface="游ゴシック"/>
-              </a:rPr>
-              <a:t>TPS推進部と「トヨタらしいAI活用」の型作り・全社展開を推進</a:t>
-            </a:r>
-          </a:p>
-        </p:txBody>
-      </p:sp>
-      <p:sp>
-        <p:nvSpPr>
-          <p:cNvPr id="13" name="Rectangle 12"/>
-          <p:cNvSpPr/>
-          <p:nvPr/>
-        </p:nvSpPr>
-        <p:spPr>
-          <a:xfrm>
-            <a:off x="548640" y="3557016"/>
-            <a:ext cx="11064240" cy="713232"/>
-          </a:xfrm>
-          <a:prstGeom prst="rect">
-            <a:avLst/>
-          </a:prstGeom>
-          <a:solidFill>
-            <a:srgbClr val="FFFFFF"/>
-          </a:solidFill>
-          <a:ln>
-            <a:solidFill>
-              <a:srgbClr val="2E6BC0"/>
-            </a:solidFill>
-          </a:ln>
-        </p:spPr>
-        <p:style>
-          <a:lnRef idx="1">
-            <a:schemeClr val="accent1"/>
-          </a:lnRef>
-          <a:fillRef idx="3">
-            <a:schemeClr val="accent1"/>
-          </a:fillRef>
-          <a:effectRef idx="2">
-            <a:schemeClr val="accent1"/>
-          </a:effectRef>
-          <a:fontRef idx="minor">
-            <a:schemeClr val="lt1"/>
-          </a:fontRef>
-        </p:style>
-        <p:txBody>
-          <a:bodyPr rtlCol="0" anchor="ctr"/>
-          <a:lstStyle/>
-          <a:p>
-            <a:pPr algn="ctr"/>
-          </a:p>
-        </p:txBody>
-      </p:sp>
-      <p:sp>
-        <p:nvSpPr>
-          <p:cNvPr id="14" name="TextBox 13"/>
-          <p:cNvSpPr txBox="1"/>
-          <p:nvPr/>
-        </p:nvSpPr>
-        <p:spPr>
-          <a:xfrm>
-            <a:off x="731520" y="3694176"/>
-            <a:ext cx="914400" cy="457200"/>
-          </a:xfrm>
-          <a:prstGeom prst="rect">
-            <a:avLst/>
-          </a:prstGeom>
-          <a:noFill/>
-        </p:spPr>
-        <p:txBody>
-          <a:bodyPr wrap="square">
-            <a:spAutoFit/>
-          </a:bodyPr>
-          <a:lstStyle/>
-          <a:p>
-            <a:pPr algn="l"/>
-            <a:r>
-              <a:rPr sz="1800" b="1">
-                <a:solidFill>
-                  <a:srgbClr val="2E6BC0"/>
-                </a:solidFill>
-                <a:latin typeface="游ゴシック"/>
-              </a:rPr>
-              <a:t>D4</a:t>
-            </a:r>
-          </a:p>
-        </p:txBody>
-      </p:sp>
-      <p:sp>
-        <p:nvSpPr>
-          <p:cNvPr id="15" name="TextBox 14"/>
-          <p:cNvSpPr txBox="1"/>
-          <p:nvPr/>
-        </p:nvSpPr>
-        <p:spPr>
-          <a:xfrm>
-            <a:off x="1737360" y="3739896"/>
-            <a:ext cx="9875520" cy="457200"/>
-          </a:xfrm>
-          <a:prstGeom prst="rect">
-            <a:avLst/>
-          </a:prstGeom>
-          <a:noFill/>
-        </p:spPr>
-        <p:txBody>
-          <a:bodyPr wrap="square">
-            <a:spAutoFit/>
-          </a:bodyPr>
-          <a:lstStyle/>
-          <a:p>
-            <a:pPr algn="l"/>
-            <a:r>
-              <a:rPr sz="1300" b="0">
-                <a:solidFill>
-                  <a:srgbClr val="22262E"/>
-                </a:solidFill>
-                <a:latin typeface="游ゴシック"/>
-              </a:rPr>
-              <a:t>6月AI活用展示会で経営層に進捗・効果を報告</a:t>
-            </a:r>
-          </a:p>
-        </p:txBody>
-      </p:sp>
-      <p:sp>
-        <p:nvSpPr>
-          <p:cNvPr id="16" name="Rectangle 15"/>
-          <p:cNvSpPr/>
-          <p:nvPr/>
-        </p:nvSpPr>
-        <p:spPr>
-          <a:xfrm>
-            <a:off x="548640" y="4361688"/>
-            <a:ext cx="11064240" cy="713232"/>
-          </a:xfrm>
-          <a:prstGeom prst="rect">
-            <a:avLst/>
-          </a:prstGeom>
-          <a:solidFill>
-            <a:srgbClr val="E9EFF7"/>
-          </a:solidFill>
-          <a:ln>
-            <a:solidFill>
-              <a:srgbClr val="2E6BC0"/>
-            </a:solidFill>
-          </a:ln>
-        </p:spPr>
-        <p:style>
-          <a:lnRef idx="1">
-            <a:schemeClr val="accent1"/>
-          </a:lnRef>
-          <a:fillRef idx="3">
-            <a:schemeClr val="accent1"/>
-          </a:fillRef>
-          <a:effectRef idx="2">
-            <a:schemeClr val="accent1"/>
-          </a:effectRef>
-          <a:fontRef idx="minor">
-            <a:schemeClr val="lt1"/>
-          </a:fontRef>
-        </p:style>
-        <p:txBody>
-          <a:bodyPr rtlCol="0" anchor="ctr"/>
-          <a:lstStyle/>
-          <a:p>
-            <a:pPr algn="ctr"/>
-          </a:p>
-        </p:txBody>
-      </p:sp>
-      <p:sp>
-        <p:nvSpPr>
-          <p:cNvPr id="17" name="TextBox 16"/>
-          <p:cNvSpPr txBox="1"/>
-          <p:nvPr/>
-        </p:nvSpPr>
-        <p:spPr>
-          <a:xfrm>
-            <a:off x="731520" y="4498848"/>
-            <a:ext cx="914400" cy="457200"/>
-          </a:xfrm>
-          <a:prstGeom prst="rect">
-            <a:avLst/>
-          </a:prstGeom>
-          <a:noFill/>
-        </p:spPr>
-        <p:txBody>
-          <a:bodyPr wrap="square">
-            <a:spAutoFit/>
-          </a:bodyPr>
-          <a:lstStyle/>
-          <a:p>
-            <a:pPr algn="l"/>
-            <a:r>
-              <a:rPr sz="1800" b="1">
-                <a:solidFill>
-                  <a:srgbClr val="2E6BC0"/>
-                </a:solidFill>
-                <a:latin typeface="游ゴシック"/>
-              </a:rPr>
-              <a:t>D5</a:t>
-            </a:r>
-          </a:p>
-        </p:txBody>
-      </p:sp>
-      <p:sp>
-        <p:nvSpPr>
-          <p:cNvPr id="18" name="TextBox 17"/>
-          <p:cNvSpPr txBox="1"/>
-          <p:nvPr/>
-        </p:nvSpPr>
-        <p:spPr>
-          <a:xfrm>
-            <a:off x="1737360" y="4544568"/>
-            <a:ext cx="9875520" cy="457200"/>
-          </a:xfrm>
-          <a:prstGeom prst="rect">
-            <a:avLst/>
-          </a:prstGeom>
-          <a:noFill/>
-        </p:spPr>
-        <p:txBody>
-          <a:bodyPr wrap="square">
-            <a:spAutoFit/>
-          </a:bodyPr>
-          <a:lstStyle/>
-          <a:p>
-            <a:pPr algn="l"/>
-            <a:r>
-              <a:rPr sz="1300" b="0">
-                <a:solidFill>
-                  <a:srgbClr val="22262E"/>
-                </a:solidFill>
-                <a:latin typeface="游ゴシック"/>
-              </a:rPr>
-              <a:t>有償ツール（Azure等）をリスト化し予算要求を準備</a:t>
-            </a:r>
-          </a:p>
-        </p:txBody>
-      </p:sp>
-      <p:sp>
-        <p:nvSpPr>
-          <p:cNvPr id="19" name="Rectangle 18"/>
-          <p:cNvSpPr/>
-          <p:nvPr/>
-        </p:nvSpPr>
-        <p:spPr>
-          <a:xfrm>
-            <a:off x="548640" y="5166360"/>
-            <a:ext cx="11064240" cy="713232"/>
-          </a:xfrm>
-          <a:prstGeom prst="rect">
-            <a:avLst/>
-          </a:prstGeom>
-          <a:solidFill>
-            <a:srgbClr val="FFFFFF"/>
-          </a:solidFill>
-          <a:ln>
-            <a:solidFill>
-              <a:srgbClr val="2E6BC0"/>
-            </a:solidFill>
-          </a:ln>
-        </p:spPr>
-        <p:style>
-          <a:lnRef idx="1">
-            <a:schemeClr val="accent1"/>
-          </a:lnRef>
-          <a:fillRef idx="3">
-            <a:schemeClr val="accent1"/>
-          </a:fillRef>
-          <a:effectRef idx="2">
-            <a:schemeClr val="accent1"/>
-          </a:effectRef>
-          <a:fontRef idx="minor">
-            <a:schemeClr val="lt1"/>
-          </a:fontRef>
-        </p:style>
-        <p:txBody>
-          <a:bodyPr rtlCol="0" anchor="ctr"/>
-          <a:lstStyle/>
-          <a:p>
-            <a:pPr algn="ctr"/>
-          </a:p>
-        </p:txBody>
-      </p:sp>
-      <p:sp>
-        <p:nvSpPr>
-          <p:cNvPr id="20" name="TextBox 19"/>
-          <p:cNvSpPr txBox="1"/>
-          <p:nvPr/>
-        </p:nvSpPr>
-        <p:spPr>
-          <a:xfrm>
-            <a:off x="731520" y="5303520"/>
-            <a:ext cx="914400" cy="457200"/>
-          </a:xfrm>
-          <a:prstGeom prst="rect">
-            <a:avLst/>
-          </a:prstGeom>
-          <a:noFill/>
-        </p:spPr>
-        <p:txBody>
-          <a:bodyPr wrap="square">
-            <a:spAutoFit/>
-          </a:bodyPr>
-          <a:lstStyle/>
-          <a:p>
-            <a:pPr algn="l"/>
-            <a:r>
-              <a:rPr sz="1800" b="1">
-                <a:solidFill>
-                  <a:srgbClr val="2E6BC0"/>
-                </a:solidFill>
-                <a:latin typeface="游ゴシック"/>
-              </a:rPr>
-              <a:t>D6</a:t>
-            </a:r>
-          </a:p>
-        </p:txBody>
-      </p:sp>
-      <p:sp>
-        <p:nvSpPr>
-          <p:cNvPr id="21" name="TextBox 20"/>
-          <p:cNvSpPr txBox="1"/>
-          <p:nvPr/>
-        </p:nvSpPr>
-        <p:spPr>
-          <a:xfrm>
-            <a:off x="1737360" y="5349240"/>
-            <a:ext cx="9875520" cy="457200"/>
-          </a:xfrm>
-          <a:prstGeom prst="rect">
-            <a:avLst/>
-          </a:prstGeom>
-          <a:noFill/>
-        </p:spPr>
-        <p:txBody>
-          <a:bodyPr wrap="square">
-            <a:spAutoFit/>
-          </a:bodyPr>
-          <a:lstStyle/>
-          <a:p>
-            <a:pPr algn="l"/>
-            <a:r>
-              <a:rPr sz="1300" b="0">
-                <a:solidFill>
-                  <a:srgbClr val="22262E"/>
-                </a:solidFill>
-                <a:latin typeface="游ゴシック"/>
-              </a:rPr>
-              <a:t>PTK・EPFマネージャー向け説明会を実施</a:t>
-            </a:r>
-          </a:p>
-        </p:txBody>
-      </p:sp>
+              <a:t>ToDo</a:t>
+            </a:r>
+          </a:p>
+        </p:txBody>
+      </p:sp>
+      <p:graphicFrame>
+        <p:nvGraphicFramePr>
+          <p:cNvPr id="5" name="Table 4"/>
+          <p:cNvGraphicFramePr>
+            <a:graphicFrameLocks noGrp="1"/>
+          </p:cNvGraphicFramePr>
+          <p:nvPr/>
+        </p:nvGraphicFramePr>
+        <p:xfrm>
+          <a:off x="914400" y="2743200"/>
+          <a:ext cx="10332719" cy="3474720"/>
+        </p:xfrm>
+        <a:graphic>
+          <a:graphicData uri="http://schemas.openxmlformats.org/drawingml/2006/table">
+            <a:tbl>
+              <a:tblPr firstRow="1" bandRow="1">
+                <a:tableStyleId>{5C22544A-7EE6-4342-B048-85BDC9FD1C3A}</a:tableStyleId>
+              </a:tblPr>
+              <a:tblGrid>
+                <a:gridCol w="1239926"/>
+                <a:gridCol w="7232904"/>
+                <a:gridCol w="1859889"/>
+              </a:tblGrid>
+              <a:tr h="434340">
+                <a:tc>
+                  <a:txBody>
+                    <a:bodyPr/>
+                    <a:lstStyle/>
+                    <a:p>
+                      <a:r>
+                        <a:rPr b="1" sz="1100">
+                          <a:solidFill>
+                            <a:srgbClr val="6C757D"/>
+                          </a:solidFill>
+                          <a:latin typeface="游ゴシック"/>
+                        </a:rPr>
+                        <a:t>担当</a:t>
+                      </a:r>
+                    </a:p>
+                  </a:txBody>
+                  <a:tcPr>
+                    <a:solidFill>
+                      <a:srgbClr val="FFFFFF"/>
+                    </a:solidFill>
+                  </a:tcPr>
+                </a:tc>
+                <a:tc>
+                  <a:txBody>
+                    <a:bodyPr/>
+                    <a:lstStyle/>
+                    <a:p>
+                      <a:r>
+                        <a:rPr b="1" sz="1100">
+                          <a:solidFill>
+                            <a:srgbClr val="6C757D"/>
+                          </a:solidFill>
+                          <a:latin typeface="游ゴシック"/>
+                        </a:rPr>
+                        <a:t>アクション</a:t>
+                      </a:r>
+                    </a:p>
+                  </a:txBody>
+                  <a:tcPr>
+                    <a:solidFill>
+                      <a:srgbClr val="FFFFFF"/>
+                    </a:solidFill>
+                  </a:tcPr>
+                </a:tc>
+                <a:tc>
+                  <a:txBody>
+                    <a:bodyPr/>
+                    <a:lstStyle/>
+                    <a:p>
+                      <a:r>
+                        <a:rPr b="1" sz="1100">
+                          <a:solidFill>
+                            <a:srgbClr val="6C757D"/>
+                          </a:solidFill>
+                          <a:latin typeface="游ゴシック"/>
+                        </a:rPr>
+                        <a:t>期限</a:t>
+                      </a:r>
+                    </a:p>
+                  </a:txBody>
+                  <a:tcPr>
+                    <a:solidFill>
+                      <a:srgbClr val="FFFFFF"/>
+                    </a:solidFill>
+                  </a:tcPr>
+                </a:tc>
+              </a:tr>
+              <a:tr h="434340">
+                <a:tc>
+                  <a:txBody>
+                    <a:bodyPr/>
+                    <a:lstStyle/>
+                    <a:p>
+                      <a:r>
+                        <a:rPr sz="1100">
+                          <a:solidFill>
+                            <a:srgbClr val="22262E"/>
+                          </a:solidFill>
+                          <a:latin typeface="游ゴシック"/>
+                        </a:rPr>
+                        <a:t>渡辺</a:t>
+                      </a:r>
+                    </a:p>
+                  </a:txBody>
+                  <a:tcPr>
+                    <a:solidFill>
+                      <a:srgbClr val="FFFFFF"/>
+                    </a:solidFill>
+                  </a:tcPr>
+                </a:tc>
+                <a:tc>
+                  <a:txBody>
+                    <a:bodyPr/>
+                    <a:lstStyle/>
+                    <a:p>
+                      <a:r>
+                        <a:rPr sz="1100">
+                          <a:solidFill>
+                            <a:srgbClr val="22262E"/>
+                          </a:solidFill>
+                          <a:latin typeface="游ゴシック"/>
+                        </a:rPr>
+                        <a:t>ハッカソン知見を共有</a:t>
+                      </a:r>
+                    </a:p>
+                  </a:txBody>
+                  <a:tcPr>
+                    <a:solidFill>
+                      <a:srgbClr val="FFFFFF"/>
+                    </a:solidFill>
+                  </a:tcPr>
+                </a:tc>
+                <a:tc>
+                  <a:txBody>
+                    <a:bodyPr/>
+                    <a:lstStyle/>
+                    <a:p>
+                      <a:r>
+                        <a:rPr sz="1100">
+                          <a:solidFill>
+                            <a:srgbClr val="22262E"/>
+                          </a:solidFill>
+                          <a:latin typeface="游ゴシック"/>
+                        </a:rPr>
+                        <a:t>5月末</a:t>
+                      </a:r>
+                    </a:p>
+                  </a:txBody>
+                  <a:tcPr>
+                    <a:solidFill>
+                      <a:srgbClr val="FFFFFF"/>
+                    </a:solidFill>
+                  </a:tcPr>
+                </a:tc>
+              </a:tr>
+              <a:tr h="434340">
+                <a:tc>
+                  <a:txBody>
+                    <a:bodyPr/>
+                    <a:lstStyle/>
+                    <a:p>
+                      <a:r>
+                        <a:rPr sz="1100">
+                          <a:solidFill>
+                            <a:srgbClr val="22262E"/>
+                          </a:solidFill>
+                          <a:latin typeface="游ゴシック"/>
+                        </a:rPr>
+                        <a:t>田原</a:t>
+                      </a:r>
+                    </a:p>
+                  </a:txBody>
+                  <a:tcPr>
+                    <a:solidFill>
+                      <a:srgbClr val="FFFFFF"/>
+                    </a:solidFill>
+                  </a:tcPr>
+                </a:tc>
+                <a:tc>
+                  <a:txBody>
+                    <a:bodyPr/>
+                    <a:lstStyle/>
+                    <a:p>
+                      <a:r>
+                        <a:rPr sz="1100">
+                          <a:solidFill>
+                            <a:srgbClr val="22262E"/>
+                          </a:solidFill>
+                          <a:latin typeface="游ゴシック"/>
+                        </a:rPr>
+                        <a:t>議事録アシスタント試験設計</a:t>
+                      </a:r>
+                    </a:p>
+                  </a:txBody>
+                  <a:tcPr>
+                    <a:solidFill>
+                      <a:srgbClr val="FFFFFF"/>
+                    </a:solidFill>
+                  </a:tcPr>
+                </a:tc>
+                <a:tc>
+                  <a:txBody>
+                    <a:bodyPr/>
+                    <a:lstStyle/>
+                    <a:p>
+                      <a:r>
+                        <a:rPr sz="1100">
+                          <a:solidFill>
+                            <a:srgbClr val="22262E"/>
+                          </a:solidFill>
+                          <a:latin typeface="游ゴシック"/>
+                        </a:rPr>
+                        <a:t>5月中</a:t>
+                      </a:r>
+                    </a:p>
+                  </a:txBody>
+                  <a:tcPr>
+                    <a:solidFill>
+                      <a:srgbClr val="FFFFFF"/>
+                    </a:solidFill>
+                  </a:tcPr>
+                </a:tc>
+              </a:tr>
+              <a:tr h="434340">
+                <a:tc>
+                  <a:txBody>
+                    <a:bodyPr/>
+                    <a:lstStyle/>
+                    <a:p>
+                      <a:r>
+                        <a:rPr sz="1100">
+                          <a:solidFill>
+                            <a:srgbClr val="22262E"/>
+                          </a:solidFill>
+                          <a:latin typeface="游ゴシック"/>
+                        </a:rPr>
+                        <a:t>湯浅</a:t>
+                      </a:r>
+                    </a:p>
+                  </a:txBody>
+                  <a:tcPr>
+                    <a:solidFill>
+                      <a:srgbClr val="FFFFFF"/>
+                    </a:solidFill>
+                  </a:tcPr>
+                </a:tc>
+                <a:tc>
+                  <a:txBody>
+                    <a:bodyPr/>
+                    <a:lstStyle/>
+                    <a:p>
+                      <a:r>
+                        <a:rPr sz="1100">
+                          <a:solidFill>
+                            <a:srgbClr val="22262E"/>
+                          </a:solidFill>
+                          <a:latin typeface="游ゴシック"/>
+                        </a:rPr>
+                        <a:t>Aqua Voice等 代替ツール評価</a:t>
+                      </a:r>
+                    </a:p>
+                  </a:txBody>
+                  <a:tcPr>
+                    <a:solidFill>
+                      <a:srgbClr val="FFFFFF"/>
+                    </a:solidFill>
+                  </a:tcPr>
+                </a:tc>
+                <a:tc>
+                  <a:txBody>
+                    <a:bodyPr/>
+                    <a:lstStyle/>
+                    <a:p>
+                      <a:r>
+                        <a:rPr sz="1100">
+                          <a:solidFill>
+                            <a:srgbClr val="22262E"/>
+                          </a:solidFill>
+                          <a:latin typeface="游ゴシック"/>
+                        </a:rPr>
+                        <a:t>5月中</a:t>
+                      </a:r>
+                    </a:p>
+                  </a:txBody>
+                  <a:tcPr>
+                    <a:solidFill>
+                      <a:srgbClr val="FFFFFF"/>
+                    </a:solidFill>
+                  </a:tcPr>
+                </a:tc>
+              </a:tr>
+              <a:tr h="434340">
+                <a:tc>
+                  <a:txBody>
+                    <a:bodyPr/>
+                    <a:lstStyle/>
+                    <a:p>
+                      <a:r>
+                        <a:rPr sz="1100">
+                          <a:solidFill>
+                            <a:srgbClr val="22262E"/>
+                          </a:solidFill>
+                          <a:latin typeface="游ゴシック"/>
+                        </a:rPr>
+                        <a:t>上地</a:t>
+                      </a:r>
+                    </a:p>
+                  </a:txBody>
+                  <a:tcPr>
+                    <a:solidFill>
+                      <a:srgbClr val="FFFFFF"/>
+                    </a:solidFill>
+                  </a:tcPr>
+                </a:tc>
+                <a:tc>
+                  <a:txBody>
+                    <a:bodyPr/>
+                    <a:lstStyle/>
+                    <a:p>
+                      <a:r>
+                        <a:rPr sz="1100">
+                          <a:solidFill>
+                            <a:srgbClr val="22262E"/>
+                          </a:solidFill>
+                          <a:latin typeface="游ゴシック"/>
+                        </a:rPr>
+                        <a:t>AI展開指針ドラフト作成</a:t>
+                      </a:r>
+                    </a:p>
+                  </a:txBody>
+                  <a:tcPr>
+                    <a:solidFill>
+                      <a:srgbClr val="FFFFFF"/>
+                    </a:solidFill>
+                  </a:tcPr>
+                </a:tc>
+                <a:tc>
+                  <a:txBody>
+                    <a:bodyPr/>
+                    <a:lstStyle/>
+                    <a:p>
+                      <a:r>
+                        <a:rPr sz="1100">
+                          <a:solidFill>
+                            <a:srgbClr val="22262E"/>
+                          </a:solidFill>
+                          <a:latin typeface="游ゴシック"/>
+                        </a:rPr>
+                        <a:t>5月末</a:t>
+                      </a:r>
+                    </a:p>
+                  </a:txBody>
+                  <a:tcPr>
+                    <a:solidFill>
+                      <a:srgbClr val="FFFFFF"/>
+                    </a:solidFill>
+                  </a:tcPr>
+                </a:tc>
+              </a:tr>
+              <a:tr h="434340">
+                <a:tc>
+                  <a:txBody>
+                    <a:bodyPr/>
+                    <a:lstStyle/>
+                    <a:p>
+                      <a:r>
+                        <a:rPr sz="1100">
+                          <a:solidFill>
+                            <a:srgbClr val="22262E"/>
+                          </a:solidFill>
+                          <a:latin typeface="游ゴシック"/>
+                        </a:rPr>
+                        <a:t>橘鷹</a:t>
+                      </a:r>
+                    </a:p>
+                  </a:txBody>
+                  <a:tcPr>
+                    <a:solidFill>
+                      <a:srgbClr val="FFFFFF"/>
+                    </a:solidFill>
+                  </a:tcPr>
+                </a:tc>
+                <a:tc>
+                  <a:txBody>
+                    <a:bodyPr/>
+                    <a:lstStyle/>
+                    <a:p>
+                      <a:r>
+                        <a:rPr sz="1100">
+                          <a:solidFill>
+                            <a:srgbClr val="22262E"/>
+                          </a:solidFill>
+                          <a:latin typeface="游ゴシック"/>
+                        </a:rPr>
+                        <a:t>TPS推進部との連携プラン</a:t>
+                      </a:r>
+                    </a:p>
+                  </a:txBody>
+                  <a:tcPr>
+                    <a:solidFill>
+                      <a:srgbClr val="FFFFFF"/>
+                    </a:solidFill>
+                  </a:tcPr>
+                </a:tc>
+                <a:tc>
+                  <a:txBody>
+                    <a:bodyPr/>
+                    <a:lstStyle/>
+                    <a:p>
+                      <a:r>
+                        <a:rPr sz="1100">
+                          <a:solidFill>
+                            <a:srgbClr val="22262E"/>
+                          </a:solidFill>
+                          <a:latin typeface="游ゴシック"/>
+                        </a:rPr>
+                        <a:t>6月前</a:t>
+                      </a:r>
+                    </a:p>
+                  </a:txBody>
+                  <a:tcPr>
+                    <a:solidFill>
+                      <a:srgbClr val="FFFFFF"/>
+                    </a:solidFill>
+                  </a:tcPr>
+                </a:tc>
+              </a:tr>
+              <a:tr h="434340">
+                <a:tc>
+                  <a:txBody>
+                    <a:bodyPr/>
+                    <a:lstStyle/>
+                    <a:p>
+                      <a:r>
+                        <a:rPr sz="1100">
+                          <a:solidFill>
+                            <a:srgbClr val="22262E"/>
+                          </a:solidFill>
+                          <a:latin typeface="游ゴシック"/>
+                        </a:rPr>
+                        <a:t>安田</a:t>
+                      </a:r>
+                    </a:p>
+                  </a:txBody>
+                  <a:tcPr>
+                    <a:solidFill>
+                      <a:srgbClr val="FFFFFF"/>
+                    </a:solidFill>
+                  </a:tcPr>
+                </a:tc>
+                <a:tc>
+                  <a:txBody>
+                    <a:bodyPr/>
+                    <a:lstStyle/>
+                    <a:p>
+                      <a:r>
+                        <a:rPr sz="1100">
+                          <a:solidFill>
+                            <a:srgbClr val="22262E"/>
+                          </a:solidFill>
+                          <a:latin typeface="游ゴシック"/>
+                        </a:rPr>
+                        <a:t>有償ツール共有フォーマット</a:t>
+                      </a:r>
+                    </a:p>
+                  </a:txBody>
+                  <a:tcPr>
+                    <a:solidFill>
+                      <a:srgbClr val="FFFFFF"/>
+                    </a:solidFill>
+                  </a:tcPr>
+                </a:tc>
+                <a:tc>
+                  <a:txBody>
+                    <a:bodyPr/>
+                    <a:lstStyle/>
+                    <a:p>
+                      <a:r>
+                        <a:rPr sz="1100">
+                          <a:solidFill>
+                            <a:srgbClr val="22262E"/>
+                          </a:solidFill>
+                          <a:latin typeface="游ゴシック"/>
+                        </a:rPr>
+                        <a:t>4月末</a:t>
+                      </a:r>
+                    </a:p>
+                  </a:txBody>
+                  <a:tcPr>
+                    <a:solidFill>
+                      <a:srgbClr val="FFFFFF"/>
+                    </a:solidFill>
+                  </a:tcPr>
+                </a:tc>
+              </a:tr>
+              <a:tr h="434340">
+                <a:tc>
+                  <a:txBody>
+                    <a:bodyPr/>
+                    <a:lstStyle/>
+                    <a:p>
+                      <a:r>
+                        <a:rPr sz="1100">
+                          <a:solidFill>
+                            <a:srgbClr val="22262E"/>
+                          </a:solidFill>
+                          <a:latin typeface="游ゴシック"/>
+                        </a:rPr>
+                        <a:t>安田</a:t>
+                      </a:r>
+                    </a:p>
+                  </a:txBody>
+                  <a:tcPr>
+                    <a:solidFill>
+                      <a:srgbClr val="FFFFFF"/>
+                    </a:solidFill>
+                  </a:tcPr>
+                </a:tc>
+                <a:tc>
+                  <a:txBody>
+                    <a:bodyPr/>
+                    <a:lstStyle/>
+                    <a:p>
+                      <a:r>
+                        <a:rPr sz="1100">
+                          <a:solidFill>
+                            <a:srgbClr val="22262E"/>
+                          </a:solidFill>
+                          <a:latin typeface="游ゴシック"/>
+                        </a:rPr>
+                        <a:t>マネージャー説明会企画</a:t>
+                      </a:r>
+                    </a:p>
+                  </a:txBody>
+                  <a:tcPr>
+                    <a:solidFill>
+                      <a:srgbClr val="FFFFFF"/>
+                    </a:solidFill>
+                  </a:tcPr>
+                </a:tc>
+                <a:tc>
+                  <a:txBody>
+                    <a:bodyPr/>
+                    <a:lstStyle/>
+                    <a:p>
+                      <a:r>
+                        <a:rPr sz="1100">
+                          <a:solidFill>
+                            <a:srgbClr val="22262E"/>
+                          </a:solidFill>
+                          <a:latin typeface="游ゴシック"/>
+                        </a:rPr>
+                        <a:t>5月末</a:t>
+                      </a:r>
+                    </a:p>
+                  </a:txBody>
+                  <a:tcPr>
+                    <a:solidFill>
+                      <a:srgbClr val="FFFFFF"/>
+                    </a:solidFill>
+                  </a:tcPr>
+                </a:tc>
+              </a:tr>
+            </a:tbl>
+          </a:graphicData>
+        </a:graphic>
+      </p:graphicFrame>
     </p:spTree>
   </p:cSld>
   <p:clrMapOvr>
@@ -7067,13 +6355,13 @@
         <p:spPr>
           <a:xfrm>
             <a:off x="0" y="0"/>
-            <a:ext cx="12191695" cy="822960"/>
+            <a:ext cx="12191695" cy="6858000"/>
           </a:xfrm>
           <a:prstGeom prst="rect">
             <a:avLst/>
           </a:prstGeom>
           <a:solidFill>
-            <a:srgbClr val="1F3A68"/>
+            <a:srgbClr val="FFFFFF"/>
           </a:solidFill>
           <a:ln>
             <a:noFill/>
@@ -7103,14 +6391,57 @@
       </p:sp>
       <p:sp>
         <p:nvSpPr>
-          <p:cNvPr id="3" name="TextBox 2"/>
+          <p:cNvPr id="3" name="Rectangle 2"/>
+          <p:cNvSpPr/>
+          <p:nvPr/>
+        </p:nvSpPr>
+        <p:spPr>
+          <a:xfrm>
+            <a:off x="914400" y="3108960"/>
+            <a:ext cx="731520" cy="36576"/>
+          </a:xfrm>
+          <a:prstGeom prst="rect">
+            <a:avLst/>
+          </a:prstGeom>
+          <a:solidFill>
+            <a:srgbClr val="1F3A68"/>
+          </a:solidFill>
+          <a:ln>
+            <a:noFill/>
+          </a:ln>
+        </p:spPr>
+        <p:style>
+          <a:lnRef idx="1">
+            <a:schemeClr val="accent1"/>
+          </a:lnRef>
+          <a:fillRef idx="3">
+            <a:schemeClr val="accent1"/>
+          </a:fillRef>
+          <a:effectRef idx="2">
+            <a:schemeClr val="accent1"/>
+          </a:effectRef>
+          <a:fontRef idx="minor">
+            <a:schemeClr val="lt1"/>
+          </a:fontRef>
+        </p:style>
+        <p:txBody>
+          <a:bodyPr rtlCol="0" anchor="ctr"/>
+          <a:lstStyle/>
+          <a:p>
+            <a:pPr algn="ctr"/>
+          </a:p>
+        </p:txBody>
+      </p:sp>
+      <p:sp>
+        <p:nvSpPr>
+          <p:cNvPr id="4" name="TextBox 3"/>
           <p:cNvSpPr txBox="1"/>
           <p:nvPr/>
         </p:nvSpPr>
         <p:spPr>
           <a:xfrm>
-            <a:off x="365760" y="182880"/>
-            <a:ext cx="11430000" cy="548640"/>
+            <a:off x="914400" y="3291840"/>
+            <a:ext cx="10058400" cy="914400"/>
           </a:xfrm>
           <a:prstGeom prst="rect">
             <a:avLst/>
@@ -7118,483 +6449,59 @@
           <a:noFill/>
         </p:spPr>
         <p:txBody>
-          <a:bodyPr wrap="none">
+          <a:bodyPr wrap="square" lIns="0" rIns="0">
             <a:spAutoFit/>
           </a:bodyPr>
           <a:lstStyle/>
           <a:p>
-            <a:r>
-              <a:rPr sz="2200" b="1">
-                <a:solidFill>
-                  <a:srgbClr val="FFFFFF"/>
+            <a:pPr algn="l"/>
+            <a:r>
+              <a:rPr sz="3000" b="1">
+                <a:solidFill>
+                  <a:srgbClr val="1F3A68"/>
                 </a:solidFill>
                 <a:latin typeface="游ゴシック"/>
               </a:rPr>
-              <a:t>ToDo（次回までのアクション）</a:t>
-            </a:r>
-          </a:p>
-        </p:txBody>
-      </p:sp>
-      <p:graphicFrame>
-        <p:nvGraphicFramePr>
-          <p:cNvPr id="4" name="Table 3"/>
-          <p:cNvGraphicFramePr>
-            <a:graphicFrameLocks noGrp="1"/>
-          </p:cNvGraphicFramePr>
-          <p:nvPr/>
-        </p:nvGraphicFramePr>
-        <p:xfrm>
-          <a:off x="548640" y="1188720"/>
-          <a:ext cx="11064240" cy="5029200"/>
-        </p:xfrm>
-        <a:graphic>
-          <a:graphicData uri="http://schemas.openxmlformats.org/drawingml/2006/table">
-            <a:tbl>
-              <a:tblPr firstRow="1" bandRow="1">
-                <a:tableStyleId>{5C22544A-7EE6-4342-B048-85BDC9FD1C3A}</a:tableStyleId>
-              </a:tblPr>
-              <a:tblGrid>
-                <a:gridCol w="1659636"/>
-                <a:gridCol w="7191756"/>
-                <a:gridCol w="2212848"/>
-              </a:tblGrid>
-              <a:tr h="628650">
-                <a:tc>
-                  <a:txBody>
-                    <a:bodyPr/>
-                    <a:lstStyle/>
-                    <a:p>
-                      <a:r>
-                        <a:rPr b="1" sz="1100">
-                          <a:solidFill>
-                            <a:srgbClr val="FFFFFF"/>
-                          </a:solidFill>
-                          <a:latin typeface="游ゴシック"/>
-                        </a:rPr>
-                        <a:t>担当</a:t>
-                      </a:r>
-                    </a:p>
-                  </a:txBody>
-                  <a:tcPr>
-                    <a:solidFill>
-                      <a:srgbClr val="1F3A68"/>
-                    </a:solidFill>
-                  </a:tcPr>
-                </a:tc>
-                <a:tc>
-                  <a:txBody>
-                    <a:bodyPr/>
-                    <a:lstStyle/>
-                    <a:p>
-                      <a:r>
-                        <a:rPr b="1" sz="1100">
-                          <a:solidFill>
-                            <a:srgbClr val="FFFFFF"/>
-                          </a:solidFill>
-                          <a:latin typeface="游ゴシック"/>
-                        </a:rPr>
-                        <a:t>アクション</a:t>
-                      </a:r>
-                    </a:p>
-                  </a:txBody>
-                  <a:tcPr>
-                    <a:solidFill>
-                      <a:srgbClr val="1F3A68"/>
-                    </a:solidFill>
-                  </a:tcPr>
-                </a:tc>
-                <a:tc>
-                  <a:txBody>
-                    <a:bodyPr/>
-                    <a:lstStyle/>
-                    <a:p>
-                      <a:r>
-                        <a:rPr b="1" sz="1100">
-                          <a:solidFill>
-                            <a:srgbClr val="FFFFFF"/>
-                          </a:solidFill>
-                          <a:latin typeface="游ゴシック"/>
-                        </a:rPr>
-                        <a:t>期限</a:t>
-                      </a:r>
-                    </a:p>
-                  </a:txBody>
-                  <a:tcPr>
-                    <a:solidFill>
-                      <a:srgbClr val="1F3A68"/>
-                    </a:solidFill>
-                  </a:tcPr>
-                </a:tc>
-              </a:tr>
-              <a:tr h="628650">
-                <a:tc>
-                  <a:txBody>
-                    <a:bodyPr/>
-                    <a:lstStyle/>
-                    <a:p>
-                      <a:r>
-                        <a:rPr sz="1000">
-                          <a:latin typeface="游ゴシック"/>
-                        </a:rPr>
-                        <a:t>渡辺</a:t>
-                      </a:r>
-                    </a:p>
-                  </a:txBody>
-                  <a:tcPr/>
-                </a:tc>
-                <a:tc>
-                  <a:txBody>
-                    <a:bodyPr/>
-                    <a:lstStyle/>
-                    <a:p>
-                      <a:r>
-                        <a:rPr sz="1000">
-                          <a:latin typeface="游ゴシック"/>
-                        </a:rPr>
-                        <a:t>ハッカソン知見を品質WGに共有</a:t>
-                      </a:r>
-                    </a:p>
-                  </a:txBody>
-                  <a:tcPr/>
-                </a:tc>
-                <a:tc>
-                  <a:txBody>
-                    <a:bodyPr/>
-                    <a:lstStyle/>
-                    <a:p>
-                      <a:r>
-                        <a:rPr sz="1000">
-                          <a:latin typeface="游ゴシック"/>
-                        </a:rPr>
-                        <a:t>5月末</a:t>
-                      </a:r>
-                    </a:p>
-                  </a:txBody>
-                  <a:tcPr/>
-                </a:tc>
-              </a:tr>
-              <a:tr h="628650">
-                <a:tc>
-                  <a:txBody>
-                    <a:bodyPr/>
-                    <a:lstStyle/>
-                    <a:p>
-                      <a:r>
-                        <a:rPr sz="1000">
-                          <a:latin typeface="游ゴシック"/>
-                        </a:rPr>
-                        <a:t>田原</a:t>
-                      </a:r>
-                    </a:p>
-                  </a:txBody>
-                  <a:tcPr>
-                    <a:solidFill>
-                      <a:srgbClr val="E9EFF7"/>
-                    </a:solidFill>
-                  </a:tcPr>
-                </a:tc>
-                <a:tc>
-                  <a:txBody>
-                    <a:bodyPr/>
-                    <a:lstStyle/>
-                    <a:p>
-                      <a:r>
-                        <a:rPr sz="1000">
-                          <a:latin typeface="游ゴシック"/>
-                        </a:rPr>
-                        <a:t>議事録アシスタント試験設計</a:t>
-                      </a:r>
-                    </a:p>
-                  </a:txBody>
-                  <a:tcPr>
-                    <a:solidFill>
-                      <a:srgbClr val="E9EFF7"/>
-                    </a:solidFill>
-                  </a:tcPr>
-                </a:tc>
-                <a:tc>
-                  <a:txBody>
-                    <a:bodyPr/>
-                    <a:lstStyle/>
-                    <a:p>
-                      <a:r>
-                        <a:rPr sz="1000">
-                          <a:latin typeface="游ゴシック"/>
-                        </a:rPr>
-                        <a:t>5月中</a:t>
-                      </a:r>
-                    </a:p>
-                  </a:txBody>
-                  <a:tcPr>
-                    <a:solidFill>
-                      <a:srgbClr val="E9EFF7"/>
-                    </a:solidFill>
-                  </a:tcPr>
-                </a:tc>
-              </a:tr>
-              <a:tr h="628650">
-                <a:tc>
-                  <a:txBody>
-                    <a:bodyPr/>
-                    <a:lstStyle/>
-                    <a:p>
-                      <a:r>
-                        <a:rPr sz="1000">
-                          <a:latin typeface="游ゴシック"/>
-                        </a:rPr>
-                        <a:t>湯浅</a:t>
-                      </a:r>
-                    </a:p>
-                  </a:txBody>
-                  <a:tcPr/>
-                </a:tc>
-                <a:tc>
-                  <a:txBody>
-                    <a:bodyPr/>
-                    <a:lstStyle/>
-                    <a:p>
-                      <a:r>
-                        <a:rPr sz="1000">
-                          <a:latin typeface="游ゴシック"/>
-                        </a:rPr>
-                        <a:t>Aqua Voice等 代替ツール評価</a:t>
-                      </a:r>
-                    </a:p>
-                  </a:txBody>
-                  <a:tcPr/>
-                </a:tc>
-                <a:tc>
-                  <a:txBody>
-                    <a:bodyPr/>
-                    <a:lstStyle/>
-                    <a:p>
-                      <a:r>
-                        <a:rPr sz="1000">
-                          <a:latin typeface="游ゴシック"/>
-                        </a:rPr>
-                        <a:t>5月中</a:t>
-                      </a:r>
-                    </a:p>
-                  </a:txBody>
-                  <a:tcPr/>
-                </a:tc>
-              </a:tr>
-              <a:tr h="628650">
-                <a:tc>
-                  <a:txBody>
-                    <a:bodyPr/>
-                    <a:lstStyle/>
-                    <a:p>
-                      <a:r>
-                        <a:rPr sz="1000">
-                          <a:latin typeface="游ゴシック"/>
-                        </a:rPr>
-                        <a:t>上地</a:t>
-                      </a:r>
-                    </a:p>
-                  </a:txBody>
-                  <a:tcPr>
-                    <a:solidFill>
-                      <a:srgbClr val="E9EFF7"/>
-                    </a:solidFill>
-                  </a:tcPr>
-                </a:tc>
-                <a:tc>
-                  <a:txBody>
-                    <a:bodyPr/>
-                    <a:lstStyle/>
-                    <a:p>
-                      <a:r>
-                        <a:rPr sz="1000">
-                          <a:latin typeface="游ゴシック"/>
-                        </a:rPr>
-                        <a:t>AI展開指針ドラフト作成</a:t>
-                      </a:r>
-                    </a:p>
-                  </a:txBody>
-                  <a:tcPr>
-                    <a:solidFill>
-                      <a:srgbClr val="E9EFF7"/>
-                    </a:solidFill>
-                  </a:tcPr>
-                </a:tc>
-                <a:tc>
-                  <a:txBody>
-                    <a:bodyPr/>
-                    <a:lstStyle/>
-                    <a:p>
-                      <a:r>
-                        <a:rPr sz="1000">
-                          <a:latin typeface="游ゴシック"/>
-                        </a:rPr>
-                        <a:t>5月末</a:t>
-                      </a:r>
-                    </a:p>
-                  </a:txBody>
-                  <a:tcPr>
-                    <a:solidFill>
-                      <a:srgbClr val="E9EFF7"/>
-                    </a:solidFill>
-                  </a:tcPr>
-                </a:tc>
-              </a:tr>
-              <a:tr h="628650">
-                <a:tc>
-                  <a:txBody>
-                    <a:bodyPr/>
-                    <a:lstStyle/>
-                    <a:p>
-                      <a:r>
-                        <a:rPr sz="1000">
-                          <a:latin typeface="游ゴシック"/>
-                        </a:rPr>
-                        <a:t>橘鷹</a:t>
-                      </a:r>
-                    </a:p>
-                  </a:txBody>
-                  <a:tcPr/>
-                </a:tc>
-                <a:tc>
-                  <a:txBody>
-                    <a:bodyPr/>
-                    <a:lstStyle/>
-                    <a:p>
-                      <a:r>
-                        <a:rPr sz="1000">
-                          <a:latin typeface="游ゴシック"/>
-                        </a:rPr>
-                        <a:t>TPS推進部との連携プラン具体化</a:t>
-                      </a:r>
-                    </a:p>
-                  </a:txBody>
-                  <a:tcPr/>
-                </a:tc>
-                <a:tc>
-                  <a:txBody>
-                    <a:bodyPr/>
-                    <a:lstStyle/>
-                    <a:p>
-                      <a:r>
-                        <a:rPr sz="1000">
-                          <a:latin typeface="游ゴシック"/>
-                        </a:rPr>
-                        <a:t>6月前</a:t>
-                      </a:r>
-                    </a:p>
-                  </a:txBody>
-                  <a:tcPr/>
-                </a:tc>
-              </a:tr>
-              <a:tr h="628650">
-                <a:tc>
-                  <a:txBody>
-                    <a:bodyPr/>
-                    <a:lstStyle/>
-                    <a:p>
-                      <a:r>
-                        <a:rPr sz="1000">
-                          <a:latin typeface="游ゴシック"/>
-                        </a:rPr>
-                        <a:t>安田</a:t>
-                      </a:r>
-                    </a:p>
-                  </a:txBody>
-                  <a:tcPr>
-                    <a:solidFill>
-                      <a:srgbClr val="E9EFF7"/>
-                    </a:solidFill>
-                  </a:tcPr>
-                </a:tc>
-                <a:tc>
-                  <a:txBody>
-                    <a:bodyPr/>
-                    <a:lstStyle/>
-                    <a:p>
-                      <a:r>
-                        <a:rPr sz="1000">
-                          <a:latin typeface="游ゴシック"/>
-                        </a:rPr>
-                        <a:t>有償ツール共有フォーマット作成</a:t>
-                      </a:r>
-                    </a:p>
-                  </a:txBody>
-                  <a:tcPr>
-                    <a:solidFill>
-                      <a:srgbClr val="E9EFF7"/>
-                    </a:solidFill>
-                  </a:tcPr>
-                </a:tc>
-                <a:tc>
-                  <a:txBody>
-                    <a:bodyPr/>
-                    <a:lstStyle/>
-                    <a:p>
-                      <a:r>
-                        <a:rPr sz="1000">
-                          <a:latin typeface="游ゴシック"/>
-                        </a:rPr>
-                        <a:t>4月末</a:t>
-                      </a:r>
-                    </a:p>
-                  </a:txBody>
-                  <a:tcPr>
-                    <a:solidFill>
-                      <a:srgbClr val="E9EFF7"/>
-                    </a:solidFill>
-                  </a:tcPr>
-                </a:tc>
-              </a:tr>
-              <a:tr h="628650">
-                <a:tc>
-                  <a:txBody>
-                    <a:bodyPr/>
-                    <a:lstStyle/>
-                    <a:p>
-                      <a:r>
-                        <a:rPr sz="1000">
-                          <a:latin typeface="游ゴシック"/>
-                        </a:rPr>
-                        <a:t>安田</a:t>
-                      </a:r>
-                    </a:p>
-                  </a:txBody>
-                  <a:tcPr/>
-                </a:tc>
-                <a:tc>
-                  <a:txBody>
-                    <a:bodyPr/>
-                    <a:lstStyle/>
-                    <a:p>
-                      <a:r>
-                        <a:rPr sz="1000">
-                          <a:latin typeface="游ゴシック"/>
-                        </a:rPr>
-                        <a:t>PTK/EPFマネージャー説明会企画</a:t>
-                      </a:r>
-                    </a:p>
-                  </a:txBody>
-                  <a:tcPr/>
-                </a:tc>
-                <a:tc>
-                  <a:txBody>
-                    <a:bodyPr/>
-                    <a:lstStyle/>
-                    <a:p>
-                      <a:r>
-                        <a:rPr sz="1000">
-                          <a:latin typeface="游ゴシック"/>
-                        </a:rPr>
-                        <a:t>5月末</a:t>
-                      </a:r>
-                    </a:p>
-                  </a:txBody>
-                  <a:tcPr/>
-                </a:tc>
-              </a:tr>
-            </a:tbl>
-          </a:graphicData>
-        </a:graphic>
-      </p:graphicFrame>
+              <a:t>次回: 2026年5月</a:t>
+            </a:r>
+          </a:p>
+        </p:txBody>
+      </p:sp>
+      <p:sp>
+        <p:nvSpPr>
+          <p:cNvPr id="5" name="TextBox 4"/>
+          <p:cNvSpPr txBox="1"/>
+          <p:nvPr/>
+        </p:nvSpPr>
+        <p:spPr>
+          <a:xfrm>
+            <a:off x="914400" y="4114800"/>
+            <a:ext cx="10058400" cy="548640"/>
+          </a:xfrm>
+          <a:prstGeom prst="rect">
+            <a:avLst/>
+          </a:prstGeom>
+          <a:noFill/>
+        </p:spPr>
+        <p:txBody>
+          <a:bodyPr wrap="square" lIns="0" rIns="0">
+            <a:spAutoFit/>
+          </a:bodyPr>
+          <a:lstStyle/>
+          <a:p>
+            <a:pPr algn="l"/>
+            <a:r>
+              <a:rPr sz="1400" b="0">
+                <a:solidFill>
+                  <a:srgbClr val="6C757D"/>
+                </a:solidFill>
+                <a:latin typeface="游ゴシック"/>
+              </a:rPr>
+              <a:t>マイルストーン: 6/15 AI活用展示会（経営層報告）</a:t>
+            </a:r>
+          </a:p>
+        </p:txBody>
+      </p:sp>
     </p:spTree>
   </p:cSld>
   <p:clrMapOvr>
